--- a/tools/FreeP.RenderCompare/corpus/05-table.pptx
+++ b/tools/FreeP.RenderCompare/corpus/05-table.pptx
@@ -129,7 +129,7 @@
           <p:cNvPr id="2" name="Title 1">
             <a:extLst>
               <a:ext uri="{FF2B5EF4-FFF2-40B4-BE49-F238E27FC236}">
-                <a16:creationId xmlns:a16="http://schemas.microsoft.com/office/drawing/2014/main" id="{96D8394A-4919-A258-84F0-697B1334C9B4}"/>
+                <a16:creationId xmlns:a16="http://schemas.microsoft.com/office/drawing/2014/main" id="{649B1C16-F0E9-7181-59F6-BBB181D15B2F}"/>
               </a:ext>
             </a:extLst>
           </p:cNvPr>
@@ -166,7 +166,7 @@
           <p:cNvPr id="3" name="Subtitle 2">
             <a:extLst>
               <a:ext uri="{FF2B5EF4-FFF2-40B4-BE49-F238E27FC236}">
-                <a16:creationId xmlns:a16="http://schemas.microsoft.com/office/drawing/2014/main" id="{348D5316-2367-B444-F846-C582C52996AE}"/>
+                <a16:creationId xmlns:a16="http://schemas.microsoft.com/office/drawing/2014/main" id="{A0957E07-7170-6490-D220-EAD0EFA42BC7}"/>
               </a:ext>
             </a:extLst>
           </p:cNvPr>
@@ -236,7 +236,7 @@
           <p:cNvPr id="4" name="Date Placeholder 3">
             <a:extLst>
               <a:ext uri="{FF2B5EF4-FFF2-40B4-BE49-F238E27FC236}">
-                <a16:creationId xmlns:a16="http://schemas.microsoft.com/office/drawing/2014/main" id="{7B68662B-5B58-AF94-5FB9-3418686C7041}"/>
+                <a16:creationId xmlns:a16="http://schemas.microsoft.com/office/drawing/2014/main" id="{5079BD3B-DBE2-DD71-E5DE-2B6BD35EDE67}"/>
               </a:ext>
             </a:extLst>
           </p:cNvPr>
@@ -252,7 +252,7 @@
           <a:bodyPr/>
           <a:lstStyle/>
           <a:p>
-            <a:fld id="{EB35B9A9-AB88-4AF6-B911-5EB3961F0353}" type="datetimeFigureOut">
+            <a:fld id="{0A1E9506-E54C-47BD-A6BA-2B5B28E28429}" type="datetimeFigureOut">
               <a:rPr lang="en-US" smtClean="0"/>
               <a:t>6/25/2026</a:t>
             </a:fld>
@@ -265,7 +265,7 @@
           <p:cNvPr id="5" name="Footer Placeholder 4">
             <a:extLst>
               <a:ext uri="{FF2B5EF4-FFF2-40B4-BE49-F238E27FC236}">
-                <a16:creationId xmlns:a16="http://schemas.microsoft.com/office/drawing/2014/main" id="{D60B1CA6-4378-1963-8F9D-CBC0C669C447}"/>
+                <a16:creationId xmlns:a16="http://schemas.microsoft.com/office/drawing/2014/main" id="{391A81B8-1B6D-0C4E-6D49-BA0BB77E8D32}"/>
               </a:ext>
             </a:extLst>
           </p:cNvPr>
@@ -290,7 +290,7 @@
           <p:cNvPr id="6" name="Slide Number Placeholder 5">
             <a:extLst>
               <a:ext uri="{FF2B5EF4-FFF2-40B4-BE49-F238E27FC236}">
-                <a16:creationId xmlns:a16="http://schemas.microsoft.com/office/drawing/2014/main" id="{540A6460-B4B6-2E28-C334-1139DA0BCE76}"/>
+                <a16:creationId xmlns:a16="http://schemas.microsoft.com/office/drawing/2014/main" id="{1FB1F307-62C5-8AB2-2860-DEA2D4F3149E}"/>
               </a:ext>
             </a:extLst>
           </p:cNvPr>
@@ -306,7 +306,7 @@
           <a:bodyPr/>
           <a:lstStyle/>
           <a:p>
-            <a:fld id="{64788AAA-8ADB-446B-841A-EEE1E095CB5D}" type="slidenum">
+            <a:fld id="{F0B12990-90F8-4915-B5EC-7ACE19A8FF3E}" type="slidenum">
               <a:rPr lang="en-US" smtClean="0"/>
               <a:t>‹#›</a:t>
             </a:fld>
@@ -317,7 +317,7 @@
     </p:spTree>
     <p:extLst>
       <p:ext uri="{BB962C8B-B14F-4D97-AF65-F5344CB8AC3E}">
-        <p14:creationId xmlns:p14="http://schemas.microsoft.com/office/powerpoint/2010/main" val="1834344927"/>
+        <p14:creationId xmlns:p14="http://schemas.microsoft.com/office/powerpoint/2010/main" val="261190881"/>
       </p:ext>
     </p:extLst>
   </p:cSld>
@@ -349,7 +349,7 @@
           <p:cNvPr id="2" name="Title 1">
             <a:extLst>
               <a:ext uri="{FF2B5EF4-FFF2-40B4-BE49-F238E27FC236}">
-                <a16:creationId xmlns:a16="http://schemas.microsoft.com/office/drawing/2014/main" id="{02C0ECFF-39BE-003F-10E9-42DAA98F5975}"/>
+                <a16:creationId xmlns:a16="http://schemas.microsoft.com/office/drawing/2014/main" id="{C60B591C-D5B0-D990-9FC3-5EB627E042C6}"/>
               </a:ext>
             </a:extLst>
           </p:cNvPr>
@@ -377,7 +377,7 @@
           <p:cNvPr id="3" name="Vertical Text Placeholder 2">
             <a:extLst>
               <a:ext uri="{FF2B5EF4-FFF2-40B4-BE49-F238E27FC236}">
-                <a16:creationId xmlns:a16="http://schemas.microsoft.com/office/drawing/2014/main" id="{E4A12F0C-237B-60F2-48E6-CF1516A2E2ED}"/>
+                <a16:creationId xmlns:a16="http://schemas.microsoft.com/office/drawing/2014/main" id="{13BCDA35-3BAF-CDC2-1DC9-358BB7D570C7}"/>
               </a:ext>
             </a:extLst>
           </p:cNvPr>
@@ -434,7 +434,7 @@
           <p:cNvPr id="4" name="Date Placeholder 3">
             <a:extLst>
               <a:ext uri="{FF2B5EF4-FFF2-40B4-BE49-F238E27FC236}">
-                <a16:creationId xmlns:a16="http://schemas.microsoft.com/office/drawing/2014/main" id="{6D264587-BE0A-12F7-047E-7AFB7035F657}"/>
+                <a16:creationId xmlns:a16="http://schemas.microsoft.com/office/drawing/2014/main" id="{7B0736E1-F63D-1456-B3B6-FB212C2D101F}"/>
               </a:ext>
             </a:extLst>
           </p:cNvPr>
@@ -450,7 +450,7 @@
           <a:bodyPr/>
           <a:lstStyle/>
           <a:p>
-            <a:fld id="{EB35B9A9-AB88-4AF6-B911-5EB3961F0353}" type="datetimeFigureOut">
+            <a:fld id="{0A1E9506-E54C-47BD-A6BA-2B5B28E28429}" type="datetimeFigureOut">
               <a:rPr lang="en-US" smtClean="0"/>
               <a:t>6/25/2026</a:t>
             </a:fld>
@@ -463,7 +463,7 @@
           <p:cNvPr id="5" name="Footer Placeholder 4">
             <a:extLst>
               <a:ext uri="{FF2B5EF4-FFF2-40B4-BE49-F238E27FC236}">
-                <a16:creationId xmlns:a16="http://schemas.microsoft.com/office/drawing/2014/main" id="{4C87FFCD-4363-D63F-397D-110CD93DB06C}"/>
+                <a16:creationId xmlns:a16="http://schemas.microsoft.com/office/drawing/2014/main" id="{F6735C61-32AF-9F44-6D9B-CD3DD9FAB220}"/>
               </a:ext>
             </a:extLst>
           </p:cNvPr>
@@ -488,7 +488,7 @@
           <p:cNvPr id="6" name="Slide Number Placeholder 5">
             <a:extLst>
               <a:ext uri="{FF2B5EF4-FFF2-40B4-BE49-F238E27FC236}">
-                <a16:creationId xmlns:a16="http://schemas.microsoft.com/office/drawing/2014/main" id="{5BF870B6-F9C7-A123-66CA-17D101408613}"/>
+                <a16:creationId xmlns:a16="http://schemas.microsoft.com/office/drawing/2014/main" id="{BA15208F-2E01-5DE9-A457-9D08C52FFCDE}"/>
               </a:ext>
             </a:extLst>
           </p:cNvPr>
@@ -504,7 +504,7 @@
           <a:bodyPr/>
           <a:lstStyle/>
           <a:p>
-            <a:fld id="{64788AAA-8ADB-446B-841A-EEE1E095CB5D}" type="slidenum">
+            <a:fld id="{F0B12990-90F8-4915-B5EC-7ACE19A8FF3E}" type="slidenum">
               <a:rPr lang="en-US" smtClean="0"/>
               <a:t>‹#›</a:t>
             </a:fld>
@@ -515,7 +515,7 @@
     </p:spTree>
     <p:extLst>
       <p:ext uri="{BB962C8B-B14F-4D97-AF65-F5344CB8AC3E}">
-        <p14:creationId xmlns:p14="http://schemas.microsoft.com/office/powerpoint/2010/main" val="1474565413"/>
+        <p14:creationId xmlns:p14="http://schemas.microsoft.com/office/powerpoint/2010/main" val="111257127"/>
       </p:ext>
     </p:extLst>
   </p:cSld>
@@ -547,7 +547,7 @@
           <p:cNvPr id="2" name="Vertical Title 1">
             <a:extLst>
               <a:ext uri="{FF2B5EF4-FFF2-40B4-BE49-F238E27FC236}">
-                <a16:creationId xmlns:a16="http://schemas.microsoft.com/office/drawing/2014/main" id="{7C9FDD35-F333-D100-441D-EE465D40825F}"/>
+                <a16:creationId xmlns:a16="http://schemas.microsoft.com/office/drawing/2014/main" id="{954D125B-4615-7BF8-B48C-114FFE60A959}"/>
               </a:ext>
             </a:extLst>
           </p:cNvPr>
@@ -580,7 +580,7 @@
           <p:cNvPr id="3" name="Vertical Text Placeholder 2">
             <a:extLst>
               <a:ext uri="{FF2B5EF4-FFF2-40B4-BE49-F238E27FC236}">
-                <a16:creationId xmlns:a16="http://schemas.microsoft.com/office/drawing/2014/main" id="{B742BC63-77F8-1350-56FB-33616C1BFA49}"/>
+                <a16:creationId xmlns:a16="http://schemas.microsoft.com/office/drawing/2014/main" id="{FCAD7A23-3CAE-D7E8-4102-4C38FDB8F875}"/>
               </a:ext>
             </a:extLst>
           </p:cNvPr>
@@ -642,7 +642,7 @@
           <p:cNvPr id="4" name="Date Placeholder 3">
             <a:extLst>
               <a:ext uri="{FF2B5EF4-FFF2-40B4-BE49-F238E27FC236}">
-                <a16:creationId xmlns:a16="http://schemas.microsoft.com/office/drawing/2014/main" id="{A919D651-B5B0-66CE-0DE9-97E54ACA029A}"/>
+                <a16:creationId xmlns:a16="http://schemas.microsoft.com/office/drawing/2014/main" id="{4968E63D-8DF3-2B4D-9ECF-91B438723B2A}"/>
               </a:ext>
             </a:extLst>
           </p:cNvPr>
@@ -658,7 +658,7 @@
           <a:bodyPr/>
           <a:lstStyle/>
           <a:p>
-            <a:fld id="{EB35B9A9-AB88-4AF6-B911-5EB3961F0353}" type="datetimeFigureOut">
+            <a:fld id="{0A1E9506-E54C-47BD-A6BA-2B5B28E28429}" type="datetimeFigureOut">
               <a:rPr lang="en-US" smtClean="0"/>
               <a:t>6/25/2026</a:t>
             </a:fld>
@@ -671,7 +671,7 @@
           <p:cNvPr id="5" name="Footer Placeholder 4">
             <a:extLst>
               <a:ext uri="{FF2B5EF4-FFF2-40B4-BE49-F238E27FC236}">
-                <a16:creationId xmlns:a16="http://schemas.microsoft.com/office/drawing/2014/main" id="{D720829A-15E0-1A89-1FE5-2B6C23EF6C71}"/>
+                <a16:creationId xmlns:a16="http://schemas.microsoft.com/office/drawing/2014/main" id="{2963A370-81F0-CBC6-1632-F62EA964A972}"/>
               </a:ext>
             </a:extLst>
           </p:cNvPr>
@@ -696,7 +696,7 @@
           <p:cNvPr id="6" name="Slide Number Placeholder 5">
             <a:extLst>
               <a:ext uri="{FF2B5EF4-FFF2-40B4-BE49-F238E27FC236}">
-                <a16:creationId xmlns:a16="http://schemas.microsoft.com/office/drawing/2014/main" id="{BA34BED0-4357-8572-E1CF-91565A66CC3B}"/>
+                <a16:creationId xmlns:a16="http://schemas.microsoft.com/office/drawing/2014/main" id="{89EBEBEE-FDFB-9B2F-8078-F386AC745FF5}"/>
               </a:ext>
             </a:extLst>
           </p:cNvPr>
@@ -712,7 +712,7 @@
           <a:bodyPr/>
           <a:lstStyle/>
           <a:p>
-            <a:fld id="{64788AAA-8ADB-446B-841A-EEE1E095CB5D}" type="slidenum">
+            <a:fld id="{F0B12990-90F8-4915-B5EC-7ACE19A8FF3E}" type="slidenum">
               <a:rPr lang="en-US" smtClean="0"/>
               <a:t>‹#›</a:t>
             </a:fld>
@@ -723,7 +723,7 @@
     </p:spTree>
     <p:extLst>
       <p:ext uri="{BB962C8B-B14F-4D97-AF65-F5344CB8AC3E}">
-        <p14:creationId xmlns:p14="http://schemas.microsoft.com/office/powerpoint/2010/main" val="3699397396"/>
+        <p14:creationId xmlns:p14="http://schemas.microsoft.com/office/powerpoint/2010/main" val="4095728242"/>
       </p:ext>
     </p:extLst>
   </p:cSld>
@@ -755,7 +755,7 @@
           <p:cNvPr id="2" name="Title 1">
             <a:extLst>
               <a:ext uri="{FF2B5EF4-FFF2-40B4-BE49-F238E27FC236}">
-                <a16:creationId xmlns:a16="http://schemas.microsoft.com/office/drawing/2014/main" id="{FD5A43A6-22CC-E357-7289-73BD79BA354C}"/>
+                <a16:creationId xmlns:a16="http://schemas.microsoft.com/office/drawing/2014/main" id="{FFABD944-5C8A-A1C0-55AC-4DD2DF21E832}"/>
               </a:ext>
             </a:extLst>
           </p:cNvPr>
@@ -783,7 +783,7 @@
           <p:cNvPr id="3" name="Content Placeholder 2">
             <a:extLst>
               <a:ext uri="{FF2B5EF4-FFF2-40B4-BE49-F238E27FC236}">
-                <a16:creationId xmlns:a16="http://schemas.microsoft.com/office/drawing/2014/main" id="{E94E258A-613B-8E3D-23A7-E10AC185C206}"/>
+                <a16:creationId xmlns:a16="http://schemas.microsoft.com/office/drawing/2014/main" id="{7B942750-F4C7-79DC-3AAE-D0692C584084}"/>
               </a:ext>
             </a:extLst>
           </p:cNvPr>
@@ -840,7 +840,7 @@
           <p:cNvPr id="4" name="Date Placeholder 3">
             <a:extLst>
               <a:ext uri="{FF2B5EF4-FFF2-40B4-BE49-F238E27FC236}">
-                <a16:creationId xmlns:a16="http://schemas.microsoft.com/office/drawing/2014/main" id="{1B889D8F-0F76-BF82-42C3-CD800A7D5B7D}"/>
+                <a16:creationId xmlns:a16="http://schemas.microsoft.com/office/drawing/2014/main" id="{D4F43339-79E7-F2FC-761D-BDFC4429934B}"/>
               </a:ext>
             </a:extLst>
           </p:cNvPr>
@@ -856,7 +856,7 @@
           <a:bodyPr/>
           <a:lstStyle/>
           <a:p>
-            <a:fld id="{EB35B9A9-AB88-4AF6-B911-5EB3961F0353}" type="datetimeFigureOut">
+            <a:fld id="{0A1E9506-E54C-47BD-A6BA-2B5B28E28429}" type="datetimeFigureOut">
               <a:rPr lang="en-US" smtClean="0"/>
               <a:t>6/25/2026</a:t>
             </a:fld>
@@ -869,7 +869,7 @@
           <p:cNvPr id="5" name="Footer Placeholder 4">
             <a:extLst>
               <a:ext uri="{FF2B5EF4-FFF2-40B4-BE49-F238E27FC236}">
-                <a16:creationId xmlns:a16="http://schemas.microsoft.com/office/drawing/2014/main" id="{FBCBC8A8-CCFF-B2F1-268F-716B9A868AB5}"/>
+                <a16:creationId xmlns:a16="http://schemas.microsoft.com/office/drawing/2014/main" id="{E8F8FDCA-6C55-2868-FAE0-C93D2D95D560}"/>
               </a:ext>
             </a:extLst>
           </p:cNvPr>
@@ -894,7 +894,7 @@
           <p:cNvPr id="6" name="Slide Number Placeholder 5">
             <a:extLst>
               <a:ext uri="{FF2B5EF4-FFF2-40B4-BE49-F238E27FC236}">
-                <a16:creationId xmlns:a16="http://schemas.microsoft.com/office/drawing/2014/main" id="{7973A487-C3BC-53E7-E86A-4B154BB795C4}"/>
+                <a16:creationId xmlns:a16="http://schemas.microsoft.com/office/drawing/2014/main" id="{6D6BE3BF-1FAC-2978-BF08-2450544EC667}"/>
               </a:ext>
             </a:extLst>
           </p:cNvPr>
@@ -910,7 +910,7 @@
           <a:bodyPr/>
           <a:lstStyle/>
           <a:p>
-            <a:fld id="{64788AAA-8ADB-446B-841A-EEE1E095CB5D}" type="slidenum">
+            <a:fld id="{F0B12990-90F8-4915-B5EC-7ACE19A8FF3E}" type="slidenum">
               <a:rPr lang="en-US" smtClean="0"/>
               <a:t>‹#›</a:t>
             </a:fld>
@@ -921,7 +921,7 @@
     </p:spTree>
     <p:extLst>
       <p:ext uri="{BB962C8B-B14F-4D97-AF65-F5344CB8AC3E}">
-        <p14:creationId xmlns:p14="http://schemas.microsoft.com/office/powerpoint/2010/main" val="448103382"/>
+        <p14:creationId xmlns:p14="http://schemas.microsoft.com/office/powerpoint/2010/main" val="3927841397"/>
       </p:ext>
     </p:extLst>
   </p:cSld>
@@ -953,7 +953,7 @@
           <p:cNvPr id="2" name="Title 1">
             <a:extLst>
               <a:ext uri="{FF2B5EF4-FFF2-40B4-BE49-F238E27FC236}">
-                <a16:creationId xmlns:a16="http://schemas.microsoft.com/office/drawing/2014/main" id="{4A29729C-4049-9AB7-73EB-8A069E2CE74F}"/>
+                <a16:creationId xmlns:a16="http://schemas.microsoft.com/office/drawing/2014/main" id="{20AB8C1C-2B92-399E-ABEA-02D51E050B20}"/>
               </a:ext>
             </a:extLst>
           </p:cNvPr>
@@ -990,7 +990,7 @@
           <p:cNvPr id="3" name="Text Placeholder 2">
             <a:extLst>
               <a:ext uri="{FF2B5EF4-FFF2-40B4-BE49-F238E27FC236}">
-                <a16:creationId xmlns:a16="http://schemas.microsoft.com/office/drawing/2014/main" id="{4463925B-BEAE-6704-2EBE-CC0A5685F71D}"/>
+                <a16:creationId xmlns:a16="http://schemas.microsoft.com/office/drawing/2014/main" id="{F6AA143C-BE2E-894A-7165-E366EFF2DE1F}"/>
               </a:ext>
             </a:extLst>
           </p:cNvPr>
@@ -1115,7 +1115,7 @@
           <p:cNvPr id="4" name="Date Placeholder 3">
             <a:extLst>
               <a:ext uri="{FF2B5EF4-FFF2-40B4-BE49-F238E27FC236}">
-                <a16:creationId xmlns:a16="http://schemas.microsoft.com/office/drawing/2014/main" id="{87C44CC4-1C48-9DC0-B2BD-0534A1C42355}"/>
+                <a16:creationId xmlns:a16="http://schemas.microsoft.com/office/drawing/2014/main" id="{5779126D-23DE-E1E8-FEA9-A696E19F5AB9}"/>
               </a:ext>
             </a:extLst>
           </p:cNvPr>
@@ -1131,7 +1131,7 @@
           <a:bodyPr/>
           <a:lstStyle/>
           <a:p>
-            <a:fld id="{EB35B9A9-AB88-4AF6-B911-5EB3961F0353}" type="datetimeFigureOut">
+            <a:fld id="{0A1E9506-E54C-47BD-A6BA-2B5B28E28429}" type="datetimeFigureOut">
               <a:rPr lang="en-US" smtClean="0"/>
               <a:t>6/25/2026</a:t>
             </a:fld>
@@ -1144,7 +1144,7 @@
           <p:cNvPr id="5" name="Footer Placeholder 4">
             <a:extLst>
               <a:ext uri="{FF2B5EF4-FFF2-40B4-BE49-F238E27FC236}">
-                <a16:creationId xmlns:a16="http://schemas.microsoft.com/office/drawing/2014/main" id="{C1ED7855-66EB-1933-6E50-F1AD0449CDA5}"/>
+                <a16:creationId xmlns:a16="http://schemas.microsoft.com/office/drawing/2014/main" id="{C3BDA6D8-ECDB-259E-9743-45F7A5A8BF49}"/>
               </a:ext>
             </a:extLst>
           </p:cNvPr>
@@ -1169,7 +1169,7 @@
           <p:cNvPr id="6" name="Slide Number Placeholder 5">
             <a:extLst>
               <a:ext uri="{FF2B5EF4-FFF2-40B4-BE49-F238E27FC236}">
-                <a16:creationId xmlns:a16="http://schemas.microsoft.com/office/drawing/2014/main" id="{7B43DFEA-2EFD-8B9C-A9F4-8706ACF87CFC}"/>
+                <a16:creationId xmlns:a16="http://schemas.microsoft.com/office/drawing/2014/main" id="{F5844FCA-86AA-922E-0BA1-E637E7F52B8B}"/>
               </a:ext>
             </a:extLst>
           </p:cNvPr>
@@ -1185,7 +1185,7 @@
           <a:bodyPr/>
           <a:lstStyle/>
           <a:p>
-            <a:fld id="{64788AAA-8ADB-446B-841A-EEE1E095CB5D}" type="slidenum">
+            <a:fld id="{F0B12990-90F8-4915-B5EC-7ACE19A8FF3E}" type="slidenum">
               <a:rPr lang="en-US" smtClean="0"/>
               <a:t>‹#›</a:t>
             </a:fld>
@@ -1196,7 +1196,7 @@
     </p:spTree>
     <p:extLst>
       <p:ext uri="{BB962C8B-B14F-4D97-AF65-F5344CB8AC3E}">
-        <p14:creationId xmlns:p14="http://schemas.microsoft.com/office/powerpoint/2010/main" val="2587871202"/>
+        <p14:creationId xmlns:p14="http://schemas.microsoft.com/office/powerpoint/2010/main" val="2188457234"/>
       </p:ext>
     </p:extLst>
   </p:cSld>
@@ -1228,7 +1228,7 @@
           <p:cNvPr id="2" name="Title 1">
             <a:extLst>
               <a:ext uri="{FF2B5EF4-FFF2-40B4-BE49-F238E27FC236}">
-                <a16:creationId xmlns:a16="http://schemas.microsoft.com/office/drawing/2014/main" id="{986485CC-3C57-7C9F-E1C9-1B4116F3FD95}"/>
+                <a16:creationId xmlns:a16="http://schemas.microsoft.com/office/drawing/2014/main" id="{79B9CC06-B6E5-B4D9-26E2-A8EACD328836}"/>
               </a:ext>
             </a:extLst>
           </p:cNvPr>
@@ -1256,7 +1256,7 @@
           <p:cNvPr id="3" name="Content Placeholder 2">
             <a:extLst>
               <a:ext uri="{FF2B5EF4-FFF2-40B4-BE49-F238E27FC236}">
-                <a16:creationId xmlns:a16="http://schemas.microsoft.com/office/drawing/2014/main" id="{5505F238-4BD5-99B7-447D-BA775DC4842D}"/>
+                <a16:creationId xmlns:a16="http://schemas.microsoft.com/office/drawing/2014/main" id="{D4F55D69-2A4D-229D-6B03-BBB48DC86514}"/>
               </a:ext>
             </a:extLst>
           </p:cNvPr>
@@ -1318,7 +1318,7 @@
           <p:cNvPr id="4" name="Content Placeholder 3">
             <a:extLst>
               <a:ext uri="{FF2B5EF4-FFF2-40B4-BE49-F238E27FC236}">
-                <a16:creationId xmlns:a16="http://schemas.microsoft.com/office/drawing/2014/main" id="{FB0CE7E8-B196-935B-27AF-EC21664AFF6A}"/>
+                <a16:creationId xmlns:a16="http://schemas.microsoft.com/office/drawing/2014/main" id="{7DB73446-F438-51C0-4D95-090E62BAE7BA}"/>
               </a:ext>
             </a:extLst>
           </p:cNvPr>
@@ -1380,7 +1380,7 @@
           <p:cNvPr id="5" name="Date Placeholder 4">
             <a:extLst>
               <a:ext uri="{FF2B5EF4-FFF2-40B4-BE49-F238E27FC236}">
-                <a16:creationId xmlns:a16="http://schemas.microsoft.com/office/drawing/2014/main" id="{BEAA4749-60CE-636E-C8C9-62CE2455B3AA}"/>
+                <a16:creationId xmlns:a16="http://schemas.microsoft.com/office/drawing/2014/main" id="{6096D8D0-DF05-A630-E7E7-03F99577B6B0}"/>
               </a:ext>
             </a:extLst>
           </p:cNvPr>
@@ -1396,7 +1396,7 @@
           <a:bodyPr/>
           <a:lstStyle/>
           <a:p>
-            <a:fld id="{EB35B9A9-AB88-4AF6-B911-5EB3961F0353}" type="datetimeFigureOut">
+            <a:fld id="{0A1E9506-E54C-47BD-A6BA-2B5B28E28429}" type="datetimeFigureOut">
               <a:rPr lang="en-US" smtClean="0"/>
               <a:t>6/25/2026</a:t>
             </a:fld>
@@ -1409,7 +1409,7 @@
           <p:cNvPr id="6" name="Footer Placeholder 5">
             <a:extLst>
               <a:ext uri="{FF2B5EF4-FFF2-40B4-BE49-F238E27FC236}">
-                <a16:creationId xmlns:a16="http://schemas.microsoft.com/office/drawing/2014/main" id="{5ADC05BF-84CD-0A32-F801-998109185D78}"/>
+                <a16:creationId xmlns:a16="http://schemas.microsoft.com/office/drawing/2014/main" id="{68041E90-78B8-BA99-C06F-B0B83FDDE355}"/>
               </a:ext>
             </a:extLst>
           </p:cNvPr>
@@ -1434,7 +1434,7 @@
           <p:cNvPr id="7" name="Slide Number Placeholder 6">
             <a:extLst>
               <a:ext uri="{FF2B5EF4-FFF2-40B4-BE49-F238E27FC236}">
-                <a16:creationId xmlns:a16="http://schemas.microsoft.com/office/drawing/2014/main" id="{4F41816B-5FAA-D9D5-D091-2B549AB5FEC2}"/>
+                <a16:creationId xmlns:a16="http://schemas.microsoft.com/office/drawing/2014/main" id="{213DB7B3-37D2-86F6-BFF9-D7508796B54C}"/>
               </a:ext>
             </a:extLst>
           </p:cNvPr>
@@ -1450,7 +1450,7 @@
           <a:bodyPr/>
           <a:lstStyle/>
           <a:p>
-            <a:fld id="{64788AAA-8ADB-446B-841A-EEE1E095CB5D}" type="slidenum">
+            <a:fld id="{F0B12990-90F8-4915-B5EC-7ACE19A8FF3E}" type="slidenum">
               <a:rPr lang="en-US" smtClean="0"/>
               <a:t>‹#›</a:t>
             </a:fld>
@@ -1461,7 +1461,7 @@
     </p:spTree>
     <p:extLst>
       <p:ext uri="{BB962C8B-B14F-4D97-AF65-F5344CB8AC3E}">
-        <p14:creationId xmlns:p14="http://schemas.microsoft.com/office/powerpoint/2010/main" val="1341860503"/>
+        <p14:creationId xmlns:p14="http://schemas.microsoft.com/office/powerpoint/2010/main" val="2565611497"/>
       </p:ext>
     </p:extLst>
   </p:cSld>
@@ -1493,7 +1493,7 @@
           <p:cNvPr id="2" name="Title 1">
             <a:extLst>
               <a:ext uri="{FF2B5EF4-FFF2-40B4-BE49-F238E27FC236}">
-                <a16:creationId xmlns:a16="http://schemas.microsoft.com/office/drawing/2014/main" id="{C3BCBE81-00C0-FE8A-6C85-4457458BD215}"/>
+                <a16:creationId xmlns:a16="http://schemas.microsoft.com/office/drawing/2014/main" id="{2531B7FC-B375-141C-55E3-BA93955DE404}"/>
               </a:ext>
             </a:extLst>
           </p:cNvPr>
@@ -1526,7 +1526,7 @@
           <p:cNvPr id="3" name="Text Placeholder 2">
             <a:extLst>
               <a:ext uri="{FF2B5EF4-FFF2-40B4-BE49-F238E27FC236}">
-                <a16:creationId xmlns:a16="http://schemas.microsoft.com/office/drawing/2014/main" id="{93CE5463-5FB3-F3C5-87A9-4B608E514F9A}"/>
+                <a16:creationId xmlns:a16="http://schemas.microsoft.com/office/drawing/2014/main" id="{CFEBB412-C194-2E7E-4509-EA9D0B24BF06}"/>
               </a:ext>
             </a:extLst>
           </p:cNvPr>
@@ -1597,7 +1597,7 @@
           <p:cNvPr id="4" name="Content Placeholder 3">
             <a:extLst>
               <a:ext uri="{FF2B5EF4-FFF2-40B4-BE49-F238E27FC236}">
-                <a16:creationId xmlns:a16="http://schemas.microsoft.com/office/drawing/2014/main" id="{3C5E56B2-37A7-C677-579C-5F127F2F4324}"/>
+                <a16:creationId xmlns:a16="http://schemas.microsoft.com/office/drawing/2014/main" id="{09ACD5BA-2093-21A8-8890-F111C83E2EB8}"/>
               </a:ext>
             </a:extLst>
           </p:cNvPr>
@@ -1659,7 +1659,7 @@
           <p:cNvPr id="5" name="Text Placeholder 4">
             <a:extLst>
               <a:ext uri="{FF2B5EF4-FFF2-40B4-BE49-F238E27FC236}">
-                <a16:creationId xmlns:a16="http://schemas.microsoft.com/office/drawing/2014/main" id="{8C6AA92C-AE43-600C-C23B-886EA97F3089}"/>
+                <a16:creationId xmlns:a16="http://schemas.microsoft.com/office/drawing/2014/main" id="{5FD06E07-1F84-C782-CEF6-3240CC0A79F5}"/>
               </a:ext>
             </a:extLst>
           </p:cNvPr>
@@ -1730,7 +1730,7 @@
           <p:cNvPr id="6" name="Content Placeholder 5">
             <a:extLst>
               <a:ext uri="{FF2B5EF4-FFF2-40B4-BE49-F238E27FC236}">
-                <a16:creationId xmlns:a16="http://schemas.microsoft.com/office/drawing/2014/main" id="{ECCC8953-93C6-8A40-BD8D-70659ADFCD48}"/>
+                <a16:creationId xmlns:a16="http://schemas.microsoft.com/office/drawing/2014/main" id="{D7279B53-6D1F-9BC6-1328-2C1B16B69871}"/>
               </a:ext>
             </a:extLst>
           </p:cNvPr>
@@ -1792,7 +1792,7 @@
           <p:cNvPr id="7" name="Date Placeholder 6">
             <a:extLst>
               <a:ext uri="{FF2B5EF4-FFF2-40B4-BE49-F238E27FC236}">
-                <a16:creationId xmlns:a16="http://schemas.microsoft.com/office/drawing/2014/main" id="{6DD670CC-6FC3-7FB2-AC1B-1D23351784B7}"/>
+                <a16:creationId xmlns:a16="http://schemas.microsoft.com/office/drawing/2014/main" id="{A8470443-AD17-B9F6-8521-8E5EDD605D60}"/>
               </a:ext>
             </a:extLst>
           </p:cNvPr>
@@ -1808,7 +1808,7 @@
           <a:bodyPr/>
           <a:lstStyle/>
           <a:p>
-            <a:fld id="{EB35B9A9-AB88-4AF6-B911-5EB3961F0353}" type="datetimeFigureOut">
+            <a:fld id="{0A1E9506-E54C-47BD-A6BA-2B5B28E28429}" type="datetimeFigureOut">
               <a:rPr lang="en-US" smtClean="0"/>
               <a:t>6/25/2026</a:t>
             </a:fld>
@@ -1821,7 +1821,7 @@
           <p:cNvPr id="8" name="Footer Placeholder 7">
             <a:extLst>
               <a:ext uri="{FF2B5EF4-FFF2-40B4-BE49-F238E27FC236}">
-                <a16:creationId xmlns:a16="http://schemas.microsoft.com/office/drawing/2014/main" id="{9F953134-853C-4A9B-74DB-55E58131313F}"/>
+                <a16:creationId xmlns:a16="http://schemas.microsoft.com/office/drawing/2014/main" id="{E65135F3-21E9-282D-9576-3AB8710B0735}"/>
               </a:ext>
             </a:extLst>
           </p:cNvPr>
@@ -1846,7 +1846,7 @@
           <p:cNvPr id="9" name="Slide Number Placeholder 8">
             <a:extLst>
               <a:ext uri="{FF2B5EF4-FFF2-40B4-BE49-F238E27FC236}">
-                <a16:creationId xmlns:a16="http://schemas.microsoft.com/office/drawing/2014/main" id="{5964C919-78AD-AE6C-89FA-FDDC96629FF1}"/>
+                <a16:creationId xmlns:a16="http://schemas.microsoft.com/office/drawing/2014/main" id="{283C63ED-0711-6AB8-D9BC-F482EDD9AA08}"/>
               </a:ext>
             </a:extLst>
           </p:cNvPr>
@@ -1862,7 +1862,7 @@
           <a:bodyPr/>
           <a:lstStyle/>
           <a:p>
-            <a:fld id="{64788AAA-8ADB-446B-841A-EEE1E095CB5D}" type="slidenum">
+            <a:fld id="{F0B12990-90F8-4915-B5EC-7ACE19A8FF3E}" type="slidenum">
               <a:rPr lang="en-US" smtClean="0"/>
               <a:t>‹#›</a:t>
             </a:fld>
@@ -1873,7 +1873,7 @@
     </p:spTree>
     <p:extLst>
       <p:ext uri="{BB962C8B-B14F-4D97-AF65-F5344CB8AC3E}">
-        <p14:creationId xmlns:p14="http://schemas.microsoft.com/office/powerpoint/2010/main" val="3794774281"/>
+        <p14:creationId xmlns:p14="http://schemas.microsoft.com/office/powerpoint/2010/main" val="1720328827"/>
       </p:ext>
     </p:extLst>
   </p:cSld>
@@ -1905,7 +1905,7 @@
           <p:cNvPr id="2" name="Title 1">
             <a:extLst>
               <a:ext uri="{FF2B5EF4-FFF2-40B4-BE49-F238E27FC236}">
-                <a16:creationId xmlns:a16="http://schemas.microsoft.com/office/drawing/2014/main" id="{D416B763-ABA4-C604-C1E4-BCFCCE5BABB0}"/>
+                <a16:creationId xmlns:a16="http://schemas.microsoft.com/office/drawing/2014/main" id="{854CA172-9B4B-EA67-B6F9-CEB790E82441}"/>
               </a:ext>
             </a:extLst>
           </p:cNvPr>
@@ -1933,7 +1933,7 @@
           <p:cNvPr id="3" name="Date Placeholder 2">
             <a:extLst>
               <a:ext uri="{FF2B5EF4-FFF2-40B4-BE49-F238E27FC236}">
-                <a16:creationId xmlns:a16="http://schemas.microsoft.com/office/drawing/2014/main" id="{2CAB250D-002C-C327-2D7C-B5097DEE84B7}"/>
+                <a16:creationId xmlns:a16="http://schemas.microsoft.com/office/drawing/2014/main" id="{1A849E66-E1F5-A820-77BA-488F8343BD86}"/>
               </a:ext>
             </a:extLst>
           </p:cNvPr>
@@ -1949,7 +1949,7 @@
           <a:bodyPr/>
           <a:lstStyle/>
           <a:p>
-            <a:fld id="{EB35B9A9-AB88-4AF6-B911-5EB3961F0353}" type="datetimeFigureOut">
+            <a:fld id="{0A1E9506-E54C-47BD-A6BA-2B5B28E28429}" type="datetimeFigureOut">
               <a:rPr lang="en-US" smtClean="0"/>
               <a:t>6/25/2026</a:t>
             </a:fld>
@@ -1962,7 +1962,7 @@
           <p:cNvPr id="4" name="Footer Placeholder 3">
             <a:extLst>
               <a:ext uri="{FF2B5EF4-FFF2-40B4-BE49-F238E27FC236}">
-                <a16:creationId xmlns:a16="http://schemas.microsoft.com/office/drawing/2014/main" id="{4698939C-5B84-3CF2-6839-AC57CBBF42A6}"/>
+                <a16:creationId xmlns:a16="http://schemas.microsoft.com/office/drawing/2014/main" id="{9C05B23C-A301-4FD3-82C8-76929A5DDAE4}"/>
               </a:ext>
             </a:extLst>
           </p:cNvPr>
@@ -1987,7 +1987,7 @@
           <p:cNvPr id="5" name="Slide Number Placeholder 4">
             <a:extLst>
               <a:ext uri="{FF2B5EF4-FFF2-40B4-BE49-F238E27FC236}">
-                <a16:creationId xmlns:a16="http://schemas.microsoft.com/office/drawing/2014/main" id="{75CF37CD-DDB2-FD51-D762-D4AE0650CB2E}"/>
+                <a16:creationId xmlns:a16="http://schemas.microsoft.com/office/drawing/2014/main" id="{DA9B68D7-CEB4-A621-FF0A-24F28F078131}"/>
               </a:ext>
             </a:extLst>
           </p:cNvPr>
@@ -2003,7 +2003,7 @@
           <a:bodyPr/>
           <a:lstStyle/>
           <a:p>
-            <a:fld id="{64788AAA-8ADB-446B-841A-EEE1E095CB5D}" type="slidenum">
+            <a:fld id="{F0B12990-90F8-4915-B5EC-7ACE19A8FF3E}" type="slidenum">
               <a:rPr lang="en-US" smtClean="0"/>
               <a:t>‹#›</a:t>
             </a:fld>
@@ -2014,7 +2014,7 @@
     </p:spTree>
     <p:extLst>
       <p:ext uri="{BB962C8B-B14F-4D97-AF65-F5344CB8AC3E}">
-        <p14:creationId xmlns:p14="http://schemas.microsoft.com/office/powerpoint/2010/main" val="3076639928"/>
+        <p14:creationId xmlns:p14="http://schemas.microsoft.com/office/powerpoint/2010/main" val="3709736814"/>
       </p:ext>
     </p:extLst>
   </p:cSld>
@@ -2046,7 +2046,7 @@
           <p:cNvPr id="2" name="Date Placeholder 1">
             <a:extLst>
               <a:ext uri="{FF2B5EF4-FFF2-40B4-BE49-F238E27FC236}">
-                <a16:creationId xmlns:a16="http://schemas.microsoft.com/office/drawing/2014/main" id="{CCEC5553-0A97-763C-02FB-848F4D17407D}"/>
+                <a16:creationId xmlns:a16="http://schemas.microsoft.com/office/drawing/2014/main" id="{85606DD4-029B-E65D-1322-564B29CEB1CD}"/>
               </a:ext>
             </a:extLst>
           </p:cNvPr>
@@ -2062,7 +2062,7 @@
           <a:bodyPr/>
           <a:lstStyle/>
           <a:p>
-            <a:fld id="{EB35B9A9-AB88-4AF6-B911-5EB3961F0353}" type="datetimeFigureOut">
+            <a:fld id="{0A1E9506-E54C-47BD-A6BA-2B5B28E28429}" type="datetimeFigureOut">
               <a:rPr lang="en-US" smtClean="0"/>
               <a:t>6/25/2026</a:t>
             </a:fld>
@@ -2075,7 +2075,7 @@
           <p:cNvPr id="3" name="Footer Placeholder 2">
             <a:extLst>
               <a:ext uri="{FF2B5EF4-FFF2-40B4-BE49-F238E27FC236}">
-                <a16:creationId xmlns:a16="http://schemas.microsoft.com/office/drawing/2014/main" id="{DC5C305E-B6DD-0C00-5AA3-B2844899B016}"/>
+                <a16:creationId xmlns:a16="http://schemas.microsoft.com/office/drawing/2014/main" id="{C09DBA27-4373-9D2C-8EB9-8A06BE941BDE}"/>
               </a:ext>
             </a:extLst>
           </p:cNvPr>
@@ -2100,7 +2100,7 @@
           <p:cNvPr id="4" name="Slide Number Placeholder 3">
             <a:extLst>
               <a:ext uri="{FF2B5EF4-FFF2-40B4-BE49-F238E27FC236}">
-                <a16:creationId xmlns:a16="http://schemas.microsoft.com/office/drawing/2014/main" id="{9379B0C6-6521-9A8F-C712-5DAB29FB9E2E}"/>
+                <a16:creationId xmlns:a16="http://schemas.microsoft.com/office/drawing/2014/main" id="{A5C62551-52FC-10D0-2F5D-B0E7FC104890}"/>
               </a:ext>
             </a:extLst>
           </p:cNvPr>
@@ -2116,7 +2116,7 @@
           <a:bodyPr/>
           <a:lstStyle/>
           <a:p>
-            <a:fld id="{64788AAA-8ADB-446B-841A-EEE1E095CB5D}" type="slidenum">
+            <a:fld id="{F0B12990-90F8-4915-B5EC-7ACE19A8FF3E}" type="slidenum">
               <a:rPr lang="en-US" smtClean="0"/>
               <a:t>‹#›</a:t>
             </a:fld>
@@ -2127,7 +2127,7 @@
     </p:spTree>
     <p:extLst>
       <p:ext uri="{BB962C8B-B14F-4D97-AF65-F5344CB8AC3E}">
-        <p14:creationId xmlns:p14="http://schemas.microsoft.com/office/powerpoint/2010/main" val="3634225372"/>
+        <p14:creationId xmlns:p14="http://schemas.microsoft.com/office/powerpoint/2010/main" val="380852404"/>
       </p:ext>
     </p:extLst>
   </p:cSld>
@@ -2159,7 +2159,7 @@
           <p:cNvPr id="2" name="Title 1">
             <a:extLst>
               <a:ext uri="{FF2B5EF4-FFF2-40B4-BE49-F238E27FC236}">
-                <a16:creationId xmlns:a16="http://schemas.microsoft.com/office/drawing/2014/main" id="{384696FE-5940-B0C5-5057-EBAB2034E24B}"/>
+                <a16:creationId xmlns:a16="http://schemas.microsoft.com/office/drawing/2014/main" id="{0C41AF56-C4DB-ED34-889E-AAA07E18925D}"/>
               </a:ext>
             </a:extLst>
           </p:cNvPr>
@@ -2196,7 +2196,7 @@
           <p:cNvPr id="3" name="Content Placeholder 2">
             <a:extLst>
               <a:ext uri="{FF2B5EF4-FFF2-40B4-BE49-F238E27FC236}">
-                <a16:creationId xmlns:a16="http://schemas.microsoft.com/office/drawing/2014/main" id="{2B26FAAA-3EC5-5FCA-BDA5-AE5B60F18651}"/>
+                <a16:creationId xmlns:a16="http://schemas.microsoft.com/office/drawing/2014/main" id="{D81FF099-753C-9365-0922-5682F3783D3F}"/>
               </a:ext>
             </a:extLst>
           </p:cNvPr>
@@ -2286,7 +2286,7 @@
           <p:cNvPr id="4" name="Text Placeholder 3">
             <a:extLst>
               <a:ext uri="{FF2B5EF4-FFF2-40B4-BE49-F238E27FC236}">
-                <a16:creationId xmlns:a16="http://schemas.microsoft.com/office/drawing/2014/main" id="{C44765F7-F8B9-D37A-ABD7-B0F727AFDD3C}"/>
+                <a16:creationId xmlns:a16="http://schemas.microsoft.com/office/drawing/2014/main" id="{D490700E-C38D-17E6-C777-071FB9A71859}"/>
               </a:ext>
             </a:extLst>
           </p:cNvPr>
@@ -2357,7 +2357,7 @@
           <p:cNvPr id="5" name="Date Placeholder 4">
             <a:extLst>
               <a:ext uri="{FF2B5EF4-FFF2-40B4-BE49-F238E27FC236}">
-                <a16:creationId xmlns:a16="http://schemas.microsoft.com/office/drawing/2014/main" id="{0460019D-A61D-D738-FAFB-B19B55C1EE9C}"/>
+                <a16:creationId xmlns:a16="http://schemas.microsoft.com/office/drawing/2014/main" id="{56B1F8C6-BFFF-E5DA-6F84-EBFD095ACC1F}"/>
               </a:ext>
             </a:extLst>
           </p:cNvPr>
@@ -2373,7 +2373,7 @@
           <a:bodyPr/>
           <a:lstStyle/>
           <a:p>
-            <a:fld id="{EB35B9A9-AB88-4AF6-B911-5EB3961F0353}" type="datetimeFigureOut">
+            <a:fld id="{0A1E9506-E54C-47BD-A6BA-2B5B28E28429}" type="datetimeFigureOut">
               <a:rPr lang="en-US" smtClean="0"/>
               <a:t>6/25/2026</a:t>
             </a:fld>
@@ -2386,7 +2386,7 @@
           <p:cNvPr id="6" name="Footer Placeholder 5">
             <a:extLst>
               <a:ext uri="{FF2B5EF4-FFF2-40B4-BE49-F238E27FC236}">
-                <a16:creationId xmlns:a16="http://schemas.microsoft.com/office/drawing/2014/main" id="{F3DBD6C4-B2F9-40AF-7482-B19D76BB0E6F}"/>
+                <a16:creationId xmlns:a16="http://schemas.microsoft.com/office/drawing/2014/main" id="{E4C4FCB7-053B-10B5-E8DC-C28F5FDE82A6}"/>
               </a:ext>
             </a:extLst>
           </p:cNvPr>
@@ -2411,7 +2411,7 @@
           <p:cNvPr id="7" name="Slide Number Placeholder 6">
             <a:extLst>
               <a:ext uri="{FF2B5EF4-FFF2-40B4-BE49-F238E27FC236}">
-                <a16:creationId xmlns:a16="http://schemas.microsoft.com/office/drawing/2014/main" id="{0D9133C7-AFEB-00C7-3E0E-39449E57FE9D}"/>
+                <a16:creationId xmlns:a16="http://schemas.microsoft.com/office/drawing/2014/main" id="{759FDC38-8CAF-63AD-2AE4-11918A8CEAD7}"/>
               </a:ext>
             </a:extLst>
           </p:cNvPr>
@@ -2427,7 +2427,7 @@
           <a:bodyPr/>
           <a:lstStyle/>
           <a:p>
-            <a:fld id="{64788AAA-8ADB-446B-841A-EEE1E095CB5D}" type="slidenum">
+            <a:fld id="{F0B12990-90F8-4915-B5EC-7ACE19A8FF3E}" type="slidenum">
               <a:rPr lang="en-US" smtClean="0"/>
               <a:t>‹#›</a:t>
             </a:fld>
@@ -2438,7 +2438,7 @@
     </p:spTree>
     <p:extLst>
       <p:ext uri="{BB962C8B-B14F-4D97-AF65-F5344CB8AC3E}">
-        <p14:creationId xmlns:p14="http://schemas.microsoft.com/office/powerpoint/2010/main" val="2297026560"/>
+        <p14:creationId xmlns:p14="http://schemas.microsoft.com/office/powerpoint/2010/main" val="2637911314"/>
       </p:ext>
     </p:extLst>
   </p:cSld>
@@ -2470,7 +2470,7 @@
           <p:cNvPr id="2" name="Title 1">
             <a:extLst>
               <a:ext uri="{FF2B5EF4-FFF2-40B4-BE49-F238E27FC236}">
-                <a16:creationId xmlns:a16="http://schemas.microsoft.com/office/drawing/2014/main" id="{71FBBFF6-E581-5E93-75BA-0041191A51A4}"/>
+                <a16:creationId xmlns:a16="http://schemas.microsoft.com/office/drawing/2014/main" id="{07812DCC-A933-3F10-516F-5504EC44B4D1}"/>
               </a:ext>
             </a:extLst>
           </p:cNvPr>
@@ -2507,7 +2507,7 @@
           <p:cNvPr id="3" name="Picture Placeholder 2">
             <a:extLst>
               <a:ext uri="{FF2B5EF4-FFF2-40B4-BE49-F238E27FC236}">
-                <a16:creationId xmlns:a16="http://schemas.microsoft.com/office/drawing/2014/main" id="{43A520E8-4E22-E970-BC01-40835AC66D74}"/>
+                <a16:creationId xmlns:a16="http://schemas.microsoft.com/office/drawing/2014/main" id="{D8842602-9580-213E-3A3B-67227A0B4487}"/>
               </a:ext>
             </a:extLst>
           </p:cNvPr>
@@ -2574,7 +2574,7 @@
           <p:cNvPr id="4" name="Text Placeholder 3">
             <a:extLst>
               <a:ext uri="{FF2B5EF4-FFF2-40B4-BE49-F238E27FC236}">
-                <a16:creationId xmlns:a16="http://schemas.microsoft.com/office/drawing/2014/main" id="{CF6FEF1D-0778-9D50-EF7C-9A38DC0E6DCE}"/>
+                <a16:creationId xmlns:a16="http://schemas.microsoft.com/office/drawing/2014/main" id="{B7D66275-B3E1-FF19-A55D-2F01E939D42A}"/>
               </a:ext>
             </a:extLst>
           </p:cNvPr>
@@ -2645,7 +2645,7 @@
           <p:cNvPr id="5" name="Date Placeholder 4">
             <a:extLst>
               <a:ext uri="{FF2B5EF4-FFF2-40B4-BE49-F238E27FC236}">
-                <a16:creationId xmlns:a16="http://schemas.microsoft.com/office/drawing/2014/main" id="{C2625A86-0D28-4967-9E47-CC6969053641}"/>
+                <a16:creationId xmlns:a16="http://schemas.microsoft.com/office/drawing/2014/main" id="{A060DAFF-A57A-140E-CAD0-C5336DC938CE}"/>
               </a:ext>
             </a:extLst>
           </p:cNvPr>
@@ -2661,7 +2661,7 @@
           <a:bodyPr/>
           <a:lstStyle/>
           <a:p>
-            <a:fld id="{EB35B9A9-AB88-4AF6-B911-5EB3961F0353}" type="datetimeFigureOut">
+            <a:fld id="{0A1E9506-E54C-47BD-A6BA-2B5B28E28429}" type="datetimeFigureOut">
               <a:rPr lang="en-US" smtClean="0"/>
               <a:t>6/25/2026</a:t>
             </a:fld>
@@ -2674,7 +2674,7 @@
           <p:cNvPr id="6" name="Footer Placeholder 5">
             <a:extLst>
               <a:ext uri="{FF2B5EF4-FFF2-40B4-BE49-F238E27FC236}">
-                <a16:creationId xmlns:a16="http://schemas.microsoft.com/office/drawing/2014/main" id="{6CAE9E81-FB47-BF2F-A000-30DBD39FA601}"/>
+                <a16:creationId xmlns:a16="http://schemas.microsoft.com/office/drawing/2014/main" id="{2E1CF04B-9CA5-4502-688F-06D36C27BE0D}"/>
               </a:ext>
             </a:extLst>
           </p:cNvPr>
@@ -2699,7 +2699,7 @@
           <p:cNvPr id="7" name="Slide Number Placeholder 6">
             <a:extLst>
               <a:ext uri="{FF2B5EF4-FFF2-40B4-BE49-F238E27FC236}">
-                <a16:creationId xmlns:a16="http://schemas.microsoft.com/office/drawing/2014/main" id="{E3B73C7D-BCA6-5E29-F2A3-50291ADC4783}"/>
+                <a16:creationId xmlns:a16="http://schemas.microsoft.com/office/drawing/2014/main" id="{8A652BDF-3C01-CAB0-0805-C6E38109CD00}"/>
               </a:ext>
             </a:extLst>
           </p:cNvPr>
@@ -2715,7 +2715,7 @@
           <a:bodyPr/>
           <a:lstStyle/>
           <a:p>
-            <a:fld id="{64788AAA-8ADB-446B-841A-EEE1E095CB5D}" type="slidenum">
+            <a:fld id="{F0B12990-90F8-4915-B5EC-7ACE19A8FF3E}" type="slidenum">
               <a:rPr lang="en-US" smtClean="0"/>
               <a:t>‹#›</a:t>
             </a:fld>
@@ -2726,7 +2726,7 @@
     </p:spTree>
     <p:extLst>
       <p:ext uri="{BB962C8B-B14F-4D97-AF65-F5344CB8AC3E}">
-        <p14:creationId xmlns:p14="http://schemas.microsoft.com/office/powerpoint/2010/main" val="41007378"/>
+        <p14:creationId xmlns:p14="http://schemas.microsoft.com/office/powerpoint/2010/main" val="2745578091"/>
       </p:ext>
     </p:extLst>
   </p:cSld>
@@ -2763,7 +2763,7 @@
           <p:cNvPr id="2" name="Title Placeholder 1">
             <a:extLst>
               <a:ext uri="{FF2B5EF4-FFF2-40B4-BE49-F238E27FC236}">
-                <a16:creationId xmlns:a16="http://schemas.microsoft.com/office/drawing/2014/main" id="{112A126F-7DA8-4A56-9D33-DB5963BF1ABE}"/>
+                <a16:creationId xmlns:a16="http://schemas.microsoft.com/office/drawing/2014/main" id="{204B9413-40F9-07C1-8E4D-0C076D7BBE62}"/>
               </a:ext>
             </a:extLst>
           </p:cNvPr>
@@ -2801,7 +2801,7 @@
           <p:cNvPr id="3" name="Text Placeholder 2">
             <a:extLst>
               <a:ext uri="{FF2B5EF4-FFF2-40B4-BE49-F238E27FC236}">
-                <a16:creationId xmlns:a16="http://schemas.microsoft.com/office/drawing/2014/main" id="{34FAF4AC-83DB-15EF-6BFC-42EE79E8BAB7}"/>
+                <a16:creationId xmlns:a16="http://schemas.microsoft.com/office/drawing/2014/main" id="{FD57E661-0567-9027-8132-544181A8BE8F}"/>
               </a:ext>
             </a:extLst>
           </p:cNvPr>
@@ -2868,7 +2868,7 @@
           <p:cNvPr id="4" name="Date Placeholder 3">
             <a:extLst>
               <a:ext uri="{FF2B5EF4-FFF2-40B4-BE49-F238E27FC236}">
-                <a16:creationId xmlns:a16="http://schemas.microsoft.com/office/drawing/2014/main" id="{B93648F1-DF28-90DD-0BF2-ED833074A6ED}"/>
+                <a16:creationId xmlns:a16="http://schemas.microsoft.com/office/drawing/2014/main" id="{C1136760-54A9-004C-E4E8-158CE5F6F58C}"/>
               </a:ext>
             </a:extLst>
           </p:cNvPr>
@@ -2902,7 +2902,7 @@
             </a:lvl1pPr>
           </a:lstStyle>
           <a:p>
-            <a:fld id="{EB35B9A9-AB88-4AF6-B911-5EB3961F0353}" type="datetimeFigureOut">
+            <a:fld id="{0A1E9506-E54C-47BD-A6BA-2B5B28E28429}" type="datetimeFigureOut">
               <a:rPr lang="en-US" smtClean="0"/>
               <a:t>6/25/2026</a:t>
             </a:fld>
@@ -2915,7 +2915,7 @@
           <p:cNvPr id="5" name="Footer Placeholder 4">
             <a:extLst>
               <a:ext uri="{FF2B5EF4-FFF2-40B4-BE49-F238E27FC236}">
-                <a16:creationId xmlns:a16="http://schemas.microsoft.com/office/drawing/2014/main" id="{1C2C7BC1-D1B9-0E09-1E76-92E09FE99FC3}"/>
+                <a16:creationId xmlns:a16="http://schemas.microsoft.com/office/drawing/2014/main" id="{074C96DE-1B6F-2D13-C614-D86E6FF7DE15}"/>
               </a:ext>
             </a:extLst>
           </p:cNvPr>
@@ -2958,7 +2958,7 @@
           <p:cNvPr id="6" name="Slide Number Placeholder 5">
             <a:extLst>
               <a:ext uri="{FF2B5EF4-FFF2-40B4-BE49-F238E27FC236}">
-                <a16:creationId xmlns:a16="http://schemas.microsoft.com/office/drawing/2014/main" id="{9F6DE6B4-E180-AF8A-1EF7-2B1FD89A745B}"/>
+                <a16:creationId xmlns:a16="http://schemas.microsoft.com/office/drawing/2014/main" id="{6679F702-72C4-36E0-A0B4-61A5D84815A0}"/>
               </a:ext>
             </a:extLst>
           </p:cNvPr>
@@ -2992,7 +2992,7 @@
             </a:lvl1pPr>
           </a:lstStyle>
           <a:p>
-            <a:fld id="{64788AAA-8ADB-446B-841A-EEE1E095CB5D}" type="slidenum">
+            <a:fld id="{F0B12990-90F8-4915-B5EC-7ACE19A8FF3E}" type="slidenum">
               <a:rPr lang="en-US" smtClean="0"/>
               <a:t>‹#›</a:t>
             </a:fld>
@@ -3003,7 +3003,7 @@
     </p:spTree>
     <p:extLst>
       <p:ext uri="{BB962C8B-B14F-4D97-AF65-F5344CB8AC3E}">
-        <p14:creationId xmlns:p14="http://schemas.microsoft.com/office/powerpoint/2010/main" val="2445859350"/>
+        <p14:creationId xmlns:p14="http://schemas.microsoft.com/office/powerpoint/2010/main" val="987700117"/>
       </p:ext>
     </p:extLst>
   </p:cSld>
@@ -3326,7 +3326,7 @@
           <p:cNvPr id="2" name="Table 1">
             <a:extLst>
               <a:ext uri="{FF2B5EF4-FFF2-40B4-BE49-F238E27FC236}">
-                <a16:creationId xmlns:a16="http://schemas.microsoft.com/office/drawing/2014/main" id="{1EA43EC2-EF58-A13E-B3C6-B53DCF0FA436}"/>
+                <a16:creationId xmlns:a16="http://schemas.microsoft.com/office/drawing/2014/main" id="{330197FB-D7F1-9CCE-9F42-159040BD07A9}"/>
               </a:ext>
             </a:extLst>
           </p:cNvPr>
@@ -3336,7 +3336,7 @@
           <p:nvPr>
             <p:extLst>
               <p:ext uri="{D42A27DB-BD31-4B8C-83A1-F6EECF244321}">
-                <p14:modId xmlns:p14="http://schemas.microsoft.com/office/powerpoint/2010/main" val="2447894588"/>
+                <p14:modId xmlns:p14="http://schemas.microsoft.com/office/powerpoint/2010/main" val="1933623058"/>
               </p:ext>
             </p:extLst>
           </p:nvPr>
@@ -3355,21 +3355,21 @@
                 <a:gridCol w="2794000">
                   <a:extLst>
                     <a:ext uri="{9D8B030D-6E8A-4147-A177-3AD203B41FA5}">
-                      <a16:colId xmlns:a16="http://schemas.microsoft.com/office/drawing/2014/main" val="3998336915"/>
+                      <a16:colId xmlns:a16="http://schemas.microsoft.com/office/drawing/2014/main" val="596671731"/>
                     </a:ext>
                   </a:extLst>
                 </a:gridCol>
                 <a:gridCol w="3048000">
                   <a:extLst>
                     <a:ext uri="{9D8B030D-6E8A-4147-A177-3AD203B41FA5}">
-                      <a16:colId xmlns:a16="http://schemas.microsoft.com/office/drawing/2014/main" val="4197218132"/>
+                      <a16:colId xmlns:a16="http://schemas.microsoft.com/office/drawing/2014/main" val="3792083064"/>
                     </a:ext>
                   </a:extLst>
                 </a:gridCol>
                 <a:gridCol w="3048000">
                   <a:extLst>
                     <a:ext uri="{9D8B030D-6E8A-4147-A177-3AD203B41FA5}">
-                      <a16:colId xmlns:a16="http://schemas.microsoft.com/office/drawing/2014/main" val="2912460504"/>
+                      <a16:colId xmlns:a16="http://schemas.microsoft.com/office/drawing/2014/main" val="1015922415"/>
                     </a:ext>
                   </a:extLst>
                 </a:gridCol>
@@ -3419,7 +3419,7 @@
                 </a:tc>
                 <a:extLst>
                   <a:ext uri="{0D108BD9-81ED-4DB2-BD59-A6C34878D82A}">
-                    <a16:rowId xmlns:a16="http://schemas.microsoft.com/office/drawing/2014/main" val="1945968171"/>
+                    <a16:rowId xmlns:a16="http://schemas.microsoft.com/office/drawing/2014/main" val="334432449"/>
                   </a:ext>
                 </a:extLst>
               </a:tr>
@@ -3468,7 +3468,7 @@
                 </a:tc>
                 <a:extLst>
                   <a:ext uri="{0D108BD9-81ED-4DB2-BD59-A6C34878D82A}">
-                    <a16:rowId xmlns:a16="http://schemas.microsoft.com/office/drawing/2014/main" val="809406226"/>
+                    <a16:rowId xmlns:a16="http://schemas.microsoft.com/office/drawing/2014/main" val="2769246230"/>
                   </a:ext>
                 </a:extLst>
               </a:tr>
@@ -3517,7 +3517,7 @@
                 </a:tc>
                 <a:extLst>
                   <a:ext uri="{0D108BD9-81ED-4DB2-BD59-A6C34878D82A}">
-                    <a16:rowId xmlns:a16="http://schemas.microsoft.com/office/drawing/2014/main" val="2418729673"/>
+                    <a16:rowId xmlns:a16="http://schemas.microsoft.com/office/drawing/2014/main" val="3574221772"/>
                   </a:ext>
                 </a:extLst>
               </a:tr>
@@ -3562,7 +3562,7 @@
                 </a:tc>
                 <a:extLst>
                   <a:ext uri="{0D108BD9-81ED-4DB2-BD59-A6C34878D82A}">
-                    <a16:rowId xmlns:a16="http://schemas.microsoft.com/office/drawing/2014/main" val="2830017585"/>
+                    <a16:rowId xmlns:a16="http://schemas.microsoft.com/office/drawing/2014/main" val="2264073915"/>
                   </a:ext>
                 </a:extLst>
               </a:tr>
@@ -3573,7 +3573,7 @@
     </p:spTree>
     <p:extLst>
       <p:ext uri="{BB962C8B-B14F-4D97-AF65-F5344CB8AC3E}">
-        <p14:creationId xmlns:p14="http://schemas.microsoft.com/office/powerpoint/2010/main" val="3272336158"/>
+        <p14:creationId xmlns:p14="http://schemas.microsoft.com/office/powerpoint/2010/main" val="3891152995"/>
       </p:ext>
     </p:extLst>
   </p:cSld>

--- a/tools/FreeP.RenderCompare/corpus/05-table.pptx
+++ b/tools/FreeP.RenderCompare/corpus/05-table.pptx
@@ -129,7 +129,7 @@
           <p:cNvPr id="2" name="Title 1">
             <a:extLst>
               <a:ext uri="{FF2B5EF4-FFF2-40B4-BE49-F238E27FC236}">
-                <a16:creationId xmlns:a16="http://schemas.microsoft.com/office/drawing/2014/main" id="{649B1C16-F0E9-7181-59F6-BBB181D15B2F}"/>
+                <a16:creationId xmlns:a16="http://schemas.microsoft.com/office/drawing/2014/main" id="{E5C9DB3F-FA75-B844-BC1F-91B99802F375}"/>
               </a:ext>
             </a:extLst>
           </p:cNvPr>
@@ -166,7 +166,7 @@
           <p:cNvPr id="3" name="Subtitle 2">
             <a:extLst>
               <a:ext uri="{FF2B5EF4-FFF2-40B4-BE49-F238E27FC236}">
-                <a16:creationId xmlns:a16="http://schemas.microsoft.com/office/drawing/2014/main" id="{A0957E07-7170-6490-D220-EAD0EFA42BC7}"/>
+                <a16:creationId xmlns:a16="http://schemas.microsoft.com/office/drawing/2014/main" id="{EE1D1576-CF37-822F-312A-B962559D7067}"/>
               </a:ext>
             </a:extLst>
           </p:cNvPr>
@@ -236,7 +236,7 @@
           <p:cNvPr id="4" name="Date Placeholder 3">
             <a:extLst>
               <a:ext uri="{FF2B5EF4-FFF2-40B4-BE49-F238E27FC236}">
-                <a16:creationId xmlns:a16="http://schemas.microsoft.com/office/drawing/2014/main" id="{5079BD3B-DBE2-DD71-E5DE-2B6BD35EDE67}"/>
+                <a16:creationId xmlns:a16="http://schemas.microsoft.com/office/drawing/2014/main" id="{0B0207DD-94A1-3A35-3908-50CD7D668FCA}"/>
               </a:ext>
             </a:extLst>
           </p:cNvPr>
@@ -252,9 +252,9 @@
           <a:bodyPr/>
           <a:lstStyle/>
           <a:p>
-            <a:fld id="{0A1E9506-E54C-47BD-A6BA-2B5B28E28429}" type="datetimeFigureOut">
+            <a:fld id="{80941BF2-BD6C-4D80-B0F9-FDDDC9F135DD}" type="datetimeFigureOut">
               <a:rPr lang="en-US" smtClean="0"/>
-              <a:t>6/25/2026</a:t>
+              <a:t>6/26/2026</a:t>
             </a:fld>
             <a:endParaRPr lang="en-US"/>
           </a:p>
@@ -265,7 +265,7 @@
           <p:cNvPr id="5" name="Footer Placeholder 4">
             <a:extLst>
               <a:ext uri="{FF2B5EF4-FFF2-40B4-BE49-F238E27FC236}">
-                <a16:creationId xmlns:a16="http://schemas.microsoft.com/office/drawing/2014/main" id="{391A81B8-1B6D-0C4E-6D49-BA0BB77E8D32}"/>
+                <a16:creationId xmlns:a16="http://schemas.microsoft.com/office/drawing/2014/main" id="{2019A7AC-0754-295A-BF7E-7FF81FF4FF82}"/>
               </a:ext>
             </a:extLst>
           </p:cNvPr>
@@ -290,7 +290,7 @@
           <p:cNvPr id="6" name="Slide Number Placeholder 5">
             <a:extLst>
               <a:ext uri="{FF2B5EF4-FFF2-40B4-BE49-F238E27FC236}">
-                <a16:creationId xmlns:a16="http://schemas.microsoft.com/office/drawing/2014/main" id="{1FB1F307-62C5-8AB2-2860-DEA2D4F3149E}"/>
+                <a16:creationId xmlns:a16="http://schemas.microsoft.com/office/drawing/2014/main" id="{842ACF5E-8E01-B12B-47B3-2AE5499F44B5}"/>
               </a:ext>
             </a:extLst>
           </p:cNvPr>
@@ -306,7 +306,7 @@
           <a:bodyPr/>
           <a:lstStyle/>
           <a:p>
-            <a:fld id="{F0B12990-90F8-4915-B5EC-7ACE19A8FF3E}" type="slidenum">
+            <a:fld id="{38259BAE-92F0-47D0-9780-505BFE5668AA}" type="slidenum">
               <a:rPr lang="en-US" smtClean="0"/>
               <a:t>‹#›</a:t>
             </a:fld>
@@ -317,7 +317,7 @@
     </p:spTree>
     <p:extLst>
       <p:ext uri="{BB962C8B-B14F-4D97-AF65-F5344CB8AC3E}">
-        <p14:creationId xmlns:p14="http://schemas.microsoft.com/office/powerpoint/2010/main" val="261190881"/>
+        <p14:creationId xmlns:p14="http://schemas.microsoft.com/office/powerpoint/2010/main" val="106294539"/>
       </p:ext>
     </p:extLst>
   </p:cSld>
@@ -349,7 +349,7 @@
           <p:cNvPr id="2" name="Title 1">
             <a:extLst>
               <a:ext uri="{FF2B5EF4-FFF2-40B4-BE49-F238E27FC236}">
-                <a16:creationId xmlns:a16="http://schemas.microsoft.com/office/drawing/2014/main" id="{C60B591C-D5B0-D990-9FC3-5EB627E042C6}"/>
+                <a16:creationId xmlns:a16="http://schemas.microsoft.com/office/drawing/2014/main" id="{57DDB087-342B-FCF1-179C-F7C10D690EDC}"/>
               </a:ext>
             </a:extLst>
           </p:cNvPr>
@@ -377,7 +377,7 @@
           <p:cNvPr id="3" name="Vertical Text Placeholder 2">
             <a:extLst>
               <a:ext uri="{FF2B5EF4-FFF2-40B4-BE49-F238E27FC236}">
-                <a16:creationId xmlns:a16="http://schemas.microsoft.com/office/drawing/2014/main" id="{13BCDA35-3BAF-CDC2-1DC9-358BB7D570C7}"/>
+                <a16:creationId xmlns:a16="http://schemas.microsoft.com/office/drawing/2014/main" id="{C4273549-EB4C-8815-74D0-6DF177CC4101}"/>
               </a:ext>
             </a:extLst>
           </p:cNvPr>
@@ -434,7 +434,7 @@
           <p:cNvPr id="4" name="Date Placeholder 3">
             <a:extLst>
               <a:ext uri="{FF2B5EF4-FFF2-40B4-BE49-F238E27FC236}">
-                <a16:creationId xmlns:a16="http://schemas.microsoft.com/office/drawing/2014/main" id="{7B0736E1-F63D-1456-B3B6-FB212C2D101F}"/>
+                <a16:creationId xmlns:a16="http://schemas.microsoft.com/office/drawing/2014/main" id="{0001B7B2-C503-F2C9-68CB-E54BD3EAFAAA}"/>
               </a:ext>
             </a:extLst>
           </p:cNvPr>
@@ -450,9 +450,9 @@
           <a:bodyPr/>
           <a:lstStyle/>
           <a:p>
-            <a:fld id="{0A1E9506-E54C-47BD-A6BA-2B5B28E28429}" type="datetimeFigureOut">
+            <a:fld id="{80941BF2-BD6C-4D80-B0F9-FDDDC9F135DD}" type="datetimeFigureOut">
               <a:rPr lang="en-US" smtClean="0"/>
-              <a:t>6/25/2026</a:t>
+              <a:t>6/26/2026</a:t>
             </a:fld>
             <a:endParaRPr lang="en-US"/>
           </a:p>
@@ -463,7 +463,7 @@
           <p:cNvPr id="5" name="Footer Placeholder 4">
             <a:extLst>
               <a:ext uri="{FF2B5EF4-FFF2-40B4-BE49-F238E27FC236}">
-                <a16:creationId xmlns:a16="http://schemas.microsoft.com/office/drawing/2014/main" id="{F6735C61-32AF-9F44-6D9B-CD3DD9FAB220}"/>
+                <a16:creationId xmlns:a16="http://schemas.microsoft.com/office/drawing/2014/main" id="{FD12813A-0AC8-2174-4C62-BFE0DF681019}"/>
               </a:ext>
             </a:extLst>
           </p:cNvPr>
@@ -488,7 +488,7 @@
           <p:cNvPr id="6" name="Slide Number Placeholder 5">
             <a:extLst>
               <a:ext uri="{FF2B5EF4-FFF2-40B4-BE49-F238E27FC236}">
-                <a16:creationId xmlns:a16="http://schemas.microsoft.com/office/drawing/2014/main" id="{BA15208F-2E01-5DE9-A457-9D08C52FFCDE}"/>
+                <a16:creationId xmlns:a16="http://schemas.microsoft.com/office/drawing/2014/main" id="{044F9D0D-9ADC-3460-76D0-7EFFC32C1B3B}"/>
               </a:ext>
             </a:extLst>
           </p:cNvPr>
@@ -504,7 +504,7 @@
           <a:bodyPr/>
           <a:lstStyle/>
           <a:p>
-            <a:fld id="{F0B12990-90F8-4915-B5EC-7ACE19A8FF3E}" type="slidenum">
+            <a:fld id="{38259BAE-92F0-47D0-9780-505BFE5668AA}" type="slidenum">
               <a:rPr lang="en-US" smtClean="0"/>
               <a:t>‹#›</a:t>
             </a:fld>
@@ -515,7 +515,7 @@
     </p:spTree>
     <p:extLst>
       <p:ext uri="{BB962C8B-B14F-4D97-AF65-F5344CB8AC3E}">
-        <p14:creationId xmlns:p14="http://schemas.microsoft.com/office/powerpoint/2010/main" val="111257127"/>
+        <p14:creationId xmlns:p14="http://schemas.microsoft.com/office/powerpoint/2010/main" val="3126199967"/>
       </p:ext>
     </p:extLst>
   </p:cSld>
@@ -547,7 +547,7 @@
           <p:cNvPr id="2" name="Vertical Title 1">
             <a:extLst>
               <a:ext uri="{FF2B5EF4-FFF2-40B4-BE49-F238E27FC236}">
-                <a16:creationId xmlns:a16="http://schemas.microsoft.com/office/drawing/2014/main" id="{954D125B-4615-7BF8-B48C-114FFE60A959}"/>
+                <a16:creationId xmlns:a16="http://schemas.microsoft.com/office/drawing/2014/main" id="{9DB28F82-2634-05F1-8C39-74557D217E5E}"/>
               </a:ext>
             </a:extLst>
           </p:cNvPr>
@@ -580,7 +580,7 @@
           <p:cNvPr id="3" name="Vertical Text Placeholder 2">
             <a:extLst>
               <a:ext uri="{FF2B5EF4-FFF2-40B4-BE49-F238E27FC236}">
-                <a16:creationId xmlns:a16="http://schemas.microsoft.com/office/drawing/2014/main" id="{FCAD7A23-3CAE-D7E8-4102-4C38FDB8F875}"/>
+                <a16:creationId xmlns:a16="http://schemas.microsoft.com/office/drawing/2014/main" id="{414785A6-B729-FB08-41FB-BBD6D776B82D}"/>
               </a:ext>
             </a:extLst>
           </p:cNvPr>
@@ -642,7 +642,7 @@
           <p:cNvPr id="4" name="Date Placeholder 3">
             <a:extLst>
               <a:ext uri="{FF2B5EF4-FFF2-40B4-BE49-F238E27FC236}">
-                <a16:creationId xmlns:a16="http://schemas.microsoft.com/office/drawing/2014/main" id="{4968E63D-8DF3-2B4D-9ECF-91B438723B2A}"/>
+                <a16:creationId xmlns:a16="http://schemas.microsoft.com/office/drawing/2014/main" id="{F0FDCC11-7027-6FDA-EF38-A1AF8585AB20}"/>
               </a:ext>
             </a:extLst>
           </p:cNvPr>
@@ -658,9 +658,9 @@
           <a:bodyPr/>
           <a:lstStyle/>
           <a:p>
-            <a:fld id="{0A1E9506-E54C-47BD-A6BA-2B5B28E28429}" type="datetimeFigureOut">
+            <a:fld id="{80941BF2-BD6C-4D80-B0F9-FDDDC9F135DD}" type="datetimeFigureOut">
               <a:rPr lang="en-US" smtClean="0"/>
-              <a:t>6/25/2026</a:t>
+              <a:t>6/26/2026</a:t>
             </a:fld>
             <a:endParaRPr lang="en-US"/>
           </a:p>
@@ -671,7 +671,7 @@
           <p:cNvPr id="5" name="Footer Placeholder 4">
             <a:extLst>
               <a:ext uri="{FF2B5EF4-FFF2-40B4-BE49-F238E27FC236}">
-                <a16:creationId xmlns:a16="http://schemas.microsoft.com/office/drawing/2014/main" id="{2963A370-81F0-CBC6-1632-F62EA964A972}"/>
+                <a16:creationId xmlns:a16="http://schemas.microsoft.com/office/drawing/2014/main" id="{DCA434DD-C573-BAA6-8737-7866F3A2019B}"/>
               </a:ext>
             </a:extLst>
           </p:cNvPr>
@@ -696,7 +696,7 @@
           <p:cNvPr id="6" name="Slide Number Placeholder 5">
             <a:extLst>
               <a:ext uri="{FF2B5EF4-FFF2-40B4-BE49-F238E27FC236}">
-                <a16:creationId xmlns:a16="http://schemas.microsoft.com/office/drawing/2014/main" id="{89EBEBEE-FDFB-9B2F-8078-F386AC745FF5}"/>
+                <a16:creationId xmlns:a16="http://schemas.microsoft.com/office/drawing/2014/main" id="{D5D93398-1FEC-5103-6F44-E90958C32A36}"/>
               </a:ext>
             </a:extLst>
           </p:cNvPr>
@@ -712,7 +712,7 @@
           <a:bodyPr/>
           <a:lstStyle/>
           <a:p>
-            <a:fld id="{F0B12990-90F8-4915-B5EC-7ACE19A8FF3E}" type="slidenum">
+            <a:fld id="{38259BAE-92F0-47D0-9780-505BFE5668AA}" type="slidenum">
               <a:rPr lang="en-US" smtClean="0"/>
               <a:t>‹#›</a:t>
             </a:fld>
@@ -723,7 +723,7 @@
     </p:spTree>
     <p:extLst>
       <p:ext uri="{BB962C8B-B14F-4D97-AF65-F5344CB8AC3E}">
-        <p14:creationId xmlns:p14="http://schemas.microsoft.com/office/powerpoint/2010/main" val="4095728242"/>
+        <p14:creationId xmlns:p14="http://schemas.microsoft.com/office/powerpoint/2010/main" val="2969719701"/>
       </p:ext>
     </p:extLst>
   </p:cSld>
@@ -755,7 +755,7 @@
           <p:cNvPr id="2" name="Title 1">
             <a:extLst>
               <a:ext uri="{FF2B5EF4-FFF2-40B4-BE49-F238E27FC236}">
-                <a16:creationId xmlns:a16="http://schemas.microsoft.com/office/drawing/2014/main" id="{FFABD944-5C8A-A1C0-55AC-4DD2DF21E832}"/>
+                <a16:creationId xmlns:a16="http://schemas.microsoft.com/office/drawing/2014/main" id="{8F550EF9-F5A4-D6C6-43AA-6FF87E8059CE}"/>
               </a:ext>
             </a:extLst>
           </p:cNvPr>
@@ -783,7 +783,7 @@
           <p:cNvPr id="3" name="Content Placeholder 2">
             <a:extLst>
               <a:ext uri="{FF2B5EF4-FFF2-40B4-BE49-F238E27FC236}">
-                <a16:creationId xmlns:a16="http://schemas.microsoft.com/office/drawing/2014/main" id="{7B942750-F4C7-79DC-3AAE-D0692C584084}"/>
+                <a16:creationId xmlns:a16="http://schemas.microsoft.com/office/drawing/2014/main" id="{3C287581-2BE2-16CE-46F3-78DFF4FAD8DF}"/>
               </a:ext>
             </a:extLst>
           </p:cNvPr>
@@ -840,7 +840,7 @@
           <p:cNvPr id="4" name="Date Placeholder 3">
             <a:extLst>
               <a:ext uri="{FF2B5EF4-FFF2-40B4-BE49-F238E27FC236}">
-                <a16:creationId xmlns:a16="http://schemas.microsoft.com/office/drawing/2014/main" id="{D4F43339-79E7-F2FC-761D-BDFC4429934B}"/>
+                <a16:creationId xmlns:a16="http://schemas.microsoft.com/office/drawing/2014/main" id="{99D411BB-D1FA-5395-F472-90C47DD0B3E9}"/>
               </a:ext>
             </a:extLst>
           </p:cNvPr>
@@ -856,9 +856,9 @@
           <a:bodyPr/>
           <a:lstStyle/>
           <a:p>
-            <a:fld id="{0A1E9506-E54C-47BD-A6BA-2B5B28E28429}" type="datetimeFigureOut">
+            <a:fld id="{80941BF2-BD6C-4D80-B0F9-FDDDC9F135DD}" type="datetimeFigureOut">
               <a:rPr lang="en-US" smtClean="0"/>
-              <a:t>6/25/2026</a:t>
+              <a:t>6/26/2026</a:t>
             </a:fld>
             <a:endParaRPr lang="en-US"/>
           </a:p>
@@ -869,7 +869,7 @@
           <p:cNvPr id="5" name="Footer Placeholder 4">
             <a:extLst>
               <a:ext uri="{FF2B5EF4-FFF2-40B4-BE49-F238E27FC236}">
-                <a16:creationId xmlns:a16="http://schemas.microsoft.com/office/drawing/2014/main" id="{E8F8FDCA-6C55-2868-FAE0-C93D2D95D560}"/>
+                <a16:creationId xmlns:a16="http://schemas.microsoft.com/office/drawing/2014/main" id="{DC1D6B4F-486A-B5B3-24DF-3A0056F31FC1}"/>
               </a:ext>
             </a:extLst>
           </p:cNvPr>
@@ -894,7 +894,7 @@
           <p:cNvPr id="6" name="Slide Number Placeholder 5">
             <a:extLst>
               <a:ext uri="{FF2B5EF4-FFF2-40B4-BE49-F238E27FC236}">
-                <a16:creationId xmlns:a16="http://schemas.microsoft.com/office/drawing/2014/main" id="{6D6BE3BF-1FAC-2978-BF08-2450544EC667}"/>
+                <a16:creationId xmlns:a16="http://schemas.microsoft.com/office/drawing/2014/main" id="{34DA6D68-2F02-81CF-3D73-72AF2E56D6DA}"/>
               </a:ext>
             </a:extLst>
           </p:cNvPr>
@@ -910,7 +910,7 @@
           <a:bodyPr/>
           <a:lstStyle/>
           <a:p>
-            <a:fld id="{F0B12990-90F8-4915-B5EC-7ACE19A8FF3E}" type="slidenum">
+            <a:fld id="{38259BAE-92F0-47D0-9780-505BFE5668AA}" type="slidenum">
               <a:rPr lang="en-US" smtClean="0"/>
               <a:t>‹#›</a:t>
             </a:fld>
@@ -921,7 +921,7 @@
     </p:spTree>
     <p:extLst>
       <p:ext uri="{BB962C8B-B14F-4D97-AF65-F5344CB8AC3E}">
-        <p14:creationId xmlns:p14="http://schemas.microsoft.com/office/powerpoint/2010/main" val="3927841397"/>
+        <p14:creationId xmlns:p14="http://schemas.microsoft.com/office/powerpoint/2010/main" val="845946332"/>
       </p:ext>
     </p:extLst>
   </p:cSld>
@@ -953,7 +953,7 @@
           <p:cNvPr id="2" name="Title 1">
             <a:extLst>
               <a:ext uri="{FF2B5EF4-FFF2-40B4-BE49-F238E27FC236}">
-                <a16:creationId xmlns:a16="http://schemas.microsoft.com/office/drawing/2014/main" id="{20AB8C1C-2B92-399E-ABEA-02D51E050B20}"/>
+                <a16:creationId xmlns:a16="http://schemas.microsoft.com/office/drawing/2014/main" id="{8873A7CA-8CC4-9855-5470-393C79918352}"/>
               </a:ext>
             </a:extLst>
           </p:cNvPr>
@@ -990,7 +990,7 @@
           <p:cNvPr id="3" name="Text Placeholder 2">
             <a:extLst>
               <a:ext uri="{FF2B5EF4-FFF2-40B4-BE49-F238E27FC236}">
-                <a16:creationId xmlns:a16="http://schemas.microsoft.com/office/drawing/2014/main" id="{F6AA143C-BE2E-894A-7165-E366EFF2DE1F}"/>
+                <a16:creationId xmlns:a16="http://schemas.microsoft.com/office/drawing/2014/main" id="{00260A6E-8FDF-5603-6B9E-116C3BFBF99A}"/>
               </a:ext>
             </a:extLst>
           </p:cNvPr>
@@ -1115,7 +1115,7 @@
           <p:cNvPr id="4" name="Date Placeholder 3">
             <a:extLst>
               <a:ext uri="{FF2B5EF4-FFF2-40B4-BE49-F238E27FC236}">
-                <a16:creationId xmlns:a16="http://schemas.microsoft.com/office/drawing/2014/main" id="{5779126D-23DE-E1E8-FEA9-A696E19F5AB9}"/>
+                <a16:creationId xmlns:a16="http://schemas.microsoft.com/office/drawing/2014/main" id="{980768D6-6856-0368-DDAE-EEC081F52ECD}"/>
               </a:ext>
             </a:extLst>
           </p:cNvPr>
@@ -1131,9 +1131,9 @@
           <a:bodyPr/>
           <a:lstStyle/>
           <a:p>
-            <a:fld id="{0A1E9506-E54C-47BD-A6BA-2B5B28E28429}" type="datetimeFigureOut">
+            <a:fld id="{80941BF2-BD6C-4D80-B0F9-FDDDC9F135DD}" type="datetimeFigureOut">
               <a:rPr lang="en-US" smtClean="0"/>
-              <a:t>6/25/2026</a:t>
+              <a:t>6/26/2026</a:t>
             </a:fld>
             <a:endParaRPr lang="en-US"/>
           </a:p>
@@ -1144,7 +1144,7 @@
           <p:cNvPr id="5" name="Footer Placeholder 4">
             <a:extLst>
               <a:ext uri="{FF2B5EF4-FFF2-40B4-BE49-F238E27FC236}">
-                <a16:creationId xmlns:a16="http://schemas.microsoft.com/office/drawing/2014/main" id="{C3BDA6D8-ECDB-259E-9743-45F7A5A8BF49}"/>
+                <a16:creationId xmlns:a16="http://schemas.microsoft.com/office/drawing/2014/main" id="{BD2124B3-BD09-B1A2-2276-EF93327E7703}"/>
               </a:ext>
             </a:extLst>
           </p:cNvPr>
@@ -1169,7 +1169,7 @@
           <p:cNvPr id="6" name="Slide Number Placeholder 5">
             <a:extLst>
               <a:ext uri="{FF2B5EF4-FFF2-40B4-BE49-F238E27FC236}">
-                <a16:creationId xmlns:a16="http://schemas.microsoft.com/office/drawing/2014/main" id="{F5844FCA-86AA-922E-0BA1-E637E7F52B8B}"/>
+                <a16:creationId xmlns:a16="http://schemas.microsoft.com/office/drawing/2014/main" id="{7DF561CC-FDE8-56AA-ED15-1D2238C81570}"/>
               </a:ext>
             </a:extLst>
           </p:cNvPr>
@@ -1185,7 +1185,7 @@
           <a:bodyPr/>
           <a:lstStyle/>
           <a:p>
-            <a:fld id="{F0B12990-90F8-4915-B5EC-7ACE19A8FF3E}" type="slidenum">
+            <a:fld id="{38259BAE-92F0-47D0-9780-505BFE5668AA}" type="slidenum">
               <a:rPr lang="en-US" smtClean="0"/>
               <a:t>‹#›</a:t>
             </a:fld>
@@ -1196,7 +1196,7 @@
     </p:spTree>
     <p:extLst>
       <p:ext uri="{BB962C8B-B14F-4D97-AF65-F5344CB8AC3E}">
-        <p14:creationId xmlns:p14="http://schemas.microsoft.com/office/powerpoint/2010/main" val="2188457234"/>
+        <p14:creationId xmlns:p14="http://schemas.microsoft.com/office/powerpoint/2010/main" val="3155659708"/>
       </p:ext>
     </p:extLst>
   </p:cSld>
@@ -1228,7 +1228,7 @@
           <p:cNvPr id="2" name="Title 1">
             <a:extLst>
               <a:ext uri="{FF2B5EF4-FFF2-40B4-BE49-F238E27FC236}">
-                <a16:creationId xmlns:a16="http://schemas.microsoft.com/office/drawing/2014/main" id="{79B9CC06-B6E5-B4D9-26E2-A8EACD328836}"/>
+                <a16:creationId xmlns:a16="http://schemas.microsoft.com/office/drawing/2014/main" id="{EEA38EFB-F976-90A3-DB58-5E392D81974A}"/>
               </a:ext>
             </a:extLst>
           </p:cNvPr>
@@ -1256,7 +1256,7 @@
           <p:cNvPr id="3" name="Content Placeholder 2">
             <a:extLst>
               <a:ext uri="{FF2B5EF4-FFF2-40B4-BE49-F238E27FC236}">
-                <a16:creationId xmlns:a16="http://schemas.microsoft.com/office/drawing/2014/main" id="{D4F55D69-2A4D-229D-6B03-BBB48DC86514}"/>
+                <a16:creationId xmlns:a16="http://schemas.microsoft.com/office/drawing/2014/main" id="{E3E93F26-8673-2BF4-CA30-94E5C1511E1D}"/>
               </a:ext>
             </a:extLst>
           </p:cNvPr>
@@ -1318,7 +1318,7 @@
           <p:cNvPr id="4" name="Content Placeholder 3">
             <a:extLst>
               <a:ext uri="{FF2B5EF4-FFF2-40B4-BE49-F238E27FC236}">
-                <a16:creationId xmlns:a16="http://schemas.microsoft.com/office/drawing/2014/main" id="{7DB73446-F438-51C0-4D95-090E62BAE7BA}"/>
+                <a16:creationId xmlns:a16="http://schemas.microsoft.com/office/drawing/2014/main" id="{9E6E3968-25BE-41BF-8EDC-6EE9BF3CBACC}"/>
               </a:ext>
             </a:extLst>
           </p:cNvPr>
@@ -1380,7 +1380,7 @@
           <p:cNvPr id="5" name="Date Placeholder 4">
             <a:extLst>
               <a:ext uri="{FF2B5EF4-FFF2-40B4-BE49-F238E27FC236}">
-                <a16:creationId xmlns:a16="http://schemas.microsoft.com/office/drawing/2014/main" id="{6096D8D0-DF05-A630-E7E7-03F99577B6B0}"/>
+                <a16:creationId xmlns:a16="http://schemas.microsoft.com/office/drawing/2014/main" id="{D04C5DF7-9CA8-07FB-8EFE-9E07E451EA9D}"/>
               </a:ext>
             </a:extLst>
           </p:cNvPr>
@@ -1396,9 +1396,9 @@
           <a:bodyPr/>
           <a:lstStyle/>
           <a:p>
-            <a:fld id="{0A1E9506-E54C-47BD-A6BA-2B5B28E28429}" type="datetimeFigureOut">
+            <a:fld id="{80941BF2-BD6C-4D80-B0F9-FDDDC9F135DD}" type="datetimeFigureOut">
               <a:rPr lang="en-US" smtClean="0"/>
-              <a:t>6/25/2026</a:t>
+              <a:t>6/26/2026</a:t>
             </a:fld>
             <a:endParaRPr lang="en-US"/>
           </a:p>
@@ -1409,7 +1409,7 @@
           <p:cNvPr id="6" name="Footer Placeholder 5">
             <a:extLst>
               <a:ext uri="{FF2B5EF4-FFF2-40B4-BE49-F238E27FC236}">
-                <a16:creationId xmlns:a16="http://schemas.microsoft.com/office/drawing/2014/main" id="{68041E90-78B8-BA99-C06F-B0B83FDDE355}"/>
+                <a16:creationId xmlns:a16="http://schemas.microsoft.com/office/drawing/2014/main" id="{45CEAE2B-E213-D8BF-C422-334C973613B5}"/>
               </a:ext>
             </a:extLst>
           </p:cNvPr>
@@ -1434,7 +1434,7 @@
           <p:cNvPr id="7" name="Slide Number Placeholder 6">
             <a:extLst>
               <a:ext uri="{FF2B5EF4-FFF2-40B4-BE49-F238E27FC236}">
-                <a16:creationId xmlns:a16="http://schemas.microsoft.com/office/drawing/2014/main" id="{213DB7B3-37D2-86F6-BFF9-D7508796B54C}"/>
+                <a16:creationId xmlns:a16="http://schemas.microsoft.com/office/drawing/2014/main" id="{044A8CFB-17D6-46B2-3BBA-2B1F3EC1D99F}"/>
               </a:ext>
             </a:extLst>
           </p:cNvPr>
@@ -1450,7 +1450,7 @@
           <a:bodyPr/>
           <a:lstStyle/>
           <a:p>
-            <a:fld id="{F0B12990-90F8-4915-B5EC-7ACE19A8FF3E}" type="slidenum">
+            <a:fld id="{38259BAE-92F0-47D0-9780-505BFE5668AA}" type="slidenum">
               <a:rPr lang="en-US" smtClean="0"/>
               <a:t>‹#›</a:t>
             </a:fld>
@@ -1461,7 +1461,7 @@
     </p:spTree>
     <p:extLst>
       <p:ext uri="{BB962C8B-B14F-4D97-AF65-F5344CB8AC3E}">
-        <p14:creationId xmlns:p14="http://schemas.microsoft.com/office/powerpoint/2010/main" val="2565611497"/>
+        <p14:creationId xmlns:p14="http://schemas.microsoft.com/office/powerpoint/2010/main" val="3414701959"/>
       </p:ext>
     </p:extLst>
   </p:cSld>
@@ -1493,7 +1493,7 @@
           <p:cNvPr id="2" name="Title 1">
             <a:extLst>
               <a:ext uri="{FF2B5EF4-FFF2-40B4-BE49-F238E27FC236}">
-                <a16:creationId xmlns:a16="http://schemas.microsoft.com/office/drawing/2014/main" id="{2531B7FC-B375-141C-55E3-BA93955DE404}"/>
+                <a16:creationId xmlns:a16="http://schemas.microsoft.com/office/drawing/2014/main" id="{838620D3-F944-DAB2-59D7-C3A9CD2A9F2E}"/>
               </a:ext>
             </a:extLst>
           </p:cNvPr>
@@ -1526,7 +1526,7 @@
           <p:cNvPr id="3" name="Text Placeholder 2">
             <a:extLst>
               <a:ext uri="{FF2B5EF4-FFF2-40B4-BE49-F238E27FC236}">
-                <a16:creationId xmlns:a16="http://schemas.microsoft.com/office/drawing/2014/main" id="{CFEBB412-C194-2E7E-4509-EA9D0B24BF06}"/>
+                <a16:creationId xmlns:a16="http://schemas.microsoft.com/office/drawing/2014/main" id="{AB96C838-BBDE-6EE1-0AD9-AC1E82E20D5F}"/>
               </a:ext>
             </a:extLst>
           </p:cNvPr>
@@ -1597,7 +1597,7 @@
           <p:cNvPr id="4" name="Content Placeholder 3">
             <a:extLst>
               <a:ext uri="{FF2B5EF4-FFF2-40B4-BE49-F238E27FC236}">
-                <a16:creationId xmlns:a16="http://schemas.microsoft.com/office/drawing/2014/main" id="{09ACD5BA-2093-21A8-8890-F111C83E2EB8}"/>
+                <a16:creationId xmlns:a16="http://schemas.microsoft.com/office/drawing/2014/main" id="{9D50813D-ABD3-A62E-6E43-3A2F2803344E}"/>
               </a:ext>
             </a:extLst>
           </p:cNvPr>
@@ -1659,7 +1659,7 @@
           <p:cNvPr id="5" name="Text Placeholder 4">
             <a:extLst>
               <a:ext uri="{FF2B5EF4-FFF2-40B4-BE49-F238E27FC236}">
-                <a16:creationId xmlns:a16="http://schemas.microsoft.com/office/drawing/2014/main" id="{5FD06E07-1F84-C782-CEF6-3240CC0A79F5}"/>
+                <a16:creationId xmlns:a16="http://schemas.microsoft.com/office/drawing/2014/main" id="{F24BDC33-C693-B3B8-CE31-A213F5332BB2}"/>
               </a:ext>
             </a:extLst>
           </p:cNvPr>
@@ -1730,7 +1730,7 @@
           <p:cNvPr id="6" name="Content Placeholder 5">
             <a:extLst>
               <a:ext uri="{FF2B5EF4-FFF2-40B4-BE49-F238E27FC236}">
-                <a16:creationId xmlns:a16="http://schemas.microsoft.com/office/drawing/2014/main" id="{D7279B53-6D1F-9BC6-1328-2C1B16B69871}"/>
+                <a16:creationId xmlns:a16="http://schemas.microsoft.com/office/drawing/2014/main" id="{E5EFEE24-D646-BE4E-1D4D-CE4772E4513C}"/>
               </a:ext>
             </a:extLst>
           </p:cNvPr>
@@ -1792,7 +1792,7 @@
           <p:cNvPr id="7" name="Date Placeholder 6">
             <a:extLst>
               <a:ext uri="{FF2B5EF4-FFF2-40B4-BE49-F238E27FC236}">
-                <a16:creationId xmlns:a16="http://schemas.microsoft.com/office/drawing/2014/main" id="{A8470443-AD17-B9F6-8521-8E5EDD605D60}"/>
+                <a16:creationId xmlns:a16="http://schemas.microsoft.com/office/drawing/2014/main" id="{85C8C9AE-5BDC-3BFF-E406-848B5519D76B}"/>
               </a:ext>
             </a:extLst>
           </p:cNvPr>
@@ -1808,9 +1808,9 @@
           <a:bodyPr/>
           <a:lstStyle/>
           <a:p>
-            <a:fld id="{0A1E9506-E54C-47BD-A6BA-2B5B28E28429}" type="datetimeFigureOut">
+            <a:fld id="{80941BF2-BD6C-4D80-B0F9-FDDDC9F135DD}" type="datetimeFigureOut">
               <a:rPr lang="en-US" smtClean="0"/>
-              <a:t>6/25/2026</a:t>
+              <a:t>6/26/2026</a:t>
             </a:fld>
             <a:endParaRPr lang="en-US"/>
           </a:p>
@@ -1821,7 +1821,7 @@
           <p:cNvPr id="8" name="Footer Placeholder 7">
             <a:extLst>
               <a:ext uri="{FF2B5EF4-FFF2-40B4-BE49-F238E27FC236}">
-                <a16:creationId xmlns:a16="http://schemas.microsoft.com/office/drawing/2014/main" id="{E65135F3-21E9-282D-9576-3AB8710B0735}"/>
+                <a16:creationId xmlns:a16="http://schemas.microsoft.com/office/drawing/2014/main" id="{1F1A111A-095E-1DFB-F11F-5B1F2E7CA20B}"/>
               </a:ext>
             </a:extLst>
           </p:cNvPr>
@@ -1846,7 +1846,7 @@
           <p:cNvPr id="9" name="Slide Number Placeholder 8">
             <a:extLst>
               <a:ext uri="{FF2B5EF4-FFF2-40B4-BE49-F238E27FC236}">
-                <a16:creationId xmlns:a16="http://schemas.microsoft.com/office/drawing/2014/main" id="{283C63ED-0711-6AB8-D9BC-F482EDD9AA08}"/>
+                <a16:creationId xmlns:a16="http://schemas.microsoft.com/office/drawing/2014/main" id="{E6A224C6-A1E2-C95E-521D-EAF7CDBD6800}"/>
               </a:ext>
             </a:extLst>
           </p:cNvPr>
@@ -1862,7 +1862,7 @@
           <a:bodyPr/>
           <a:lstStyle/>
           <a:p>
-            <a:fld id="{F0B12990-90F8-4915-B5EC-7ACE19A8FF3E}" type="slidenum">
+            <a:fld id="{38259BAE-92F0-47D0-9780-505BFE5668AA}" type="slidenum">
               <a:rPr lang="en-US" smtClean="0"/>
               <a:t>‹#›</a:t>
             </a:fld>
@@ -1873,7 +1873,7 @@
     </p:spTree>
     <p:extLst>
       <p:ext uri="{BB962C8B-B14F-4D97-AF65-F5344CB8AC3E}">
-        <p14:creationId xmlns:p14="http://schemas.microsoft.com/office/powerpoint/2010/main" val="1720328827"/>
+        <p14:creationId xmlns:p14="http://schemas.microsoft.com/office/powerpoint/2010/main" val="1931181207"/>
       </p:ext>
     </p:extLst>
   </p:cSld>
@@ -1905,7 +1905,7 @@
           <p:cNvPr id="2" name="Title 1">
             <a:extLst>
               <a:ext uri="{FF2B5EF4-FFF2-40B4-BE49-F238E27FC236}">
-                <a16:creationId xmlns:a16="http://schemas.microsoft.com/office/drawing/2014/main" id="{854CA172-9B4B-EA67-B6F9-CEB790E82441}"/>
+                <a16:creationId xmlns:a16="http://schemas.microsoft.com/office/drawing/2014/main" id="{376987F8-C694-1F62-3399-D058E823B8A7}"/>
               </a:ext>
             </a:extLst>
           </p:cNvPr>
@@ -1933,7 +1933,7 @@
           <p:cNvPr id="3" name="Date Placeholder 2">
             <a:extLst>
               <a:ext uri="{FF2B5EF4-FFF2-40B4-BE49-F238E27FC236}">
-                <a16:creationId xmlns:a16="http://schemas.microsoft.com/office/drawing/2014/main" id="{1A849E66-E1F5-A820-77BA-488F8343BD86}"/>
+                <a16:creationId xmlns:a16="http://schemas.microsoft.com/office/drawing/2014/main" id="{4142D6D7-2C51-5B47-4F23-B12669764CF4}"/>
               </a:ext>
             </a:extLst>
           </p:cNvPr>
@@ -1949,9 +1949,9 @@
           <a:bodyPr/>
           <a:lstStyle/>
           <a:p>
-            <a:fld id="{0A1E9506-E54C-47BD-A6BA-2B5B28E28429}" type="datetimeFigureOut">
+            <a:fld id="{80941BF2-BD6C-4D80-B0F9-FDDDC9F135DD}" type="datetimeFigureOut">
               <a:rPr lang="en-US" smtClean="0"/>
-              <a:t>6/25/2026</a:t>
+              <a:t>6/26/2026</a:t>
             </a:fld>
             <a:endParaRPr lang="en-US"/>
           </a:p>
@@ -1962,7 +1962,7 @@
           <p:cNvPr id="4" name="Footer Placeholder 3">
             <a:extLst>
               <a:ext uri="{FF2B5EF4-FFF2-40B4-BE49-F238E27FC236}">
-                <a16:creationId xmlns:a16="http://schemas.microsoft.com/office/drawing/2014/main" id="{9C05B23C-A301-4FD3-82C8-76929A5DDAE4}"/>
+                <a16:creationId xmlns:a16="http://schemas.microsoft.com/office/drawing/2014/main" id="{5E3C9A34-630F-8B2D-C6FF-596E2EF89ACF}"/>
               </a:ext>
             </a:extLst>
           </p:cNvPr>
@@ -1987,7 +1987,7 @@
           <p:cNvPr id="5" name="Slide Number Placeholder 4">
             <a:extLst>
               <a:ext uri="{FF2B5EF4-FFF2-40B4-BE49-F238E27FC236}">
-                <a16:creationId xmlns:a16="http://schemas.microsoft.com/office/drawing/2014/main" id="{DA9B68D7-CEB4-A621-FF0A-24F28F078131}"/>
+                <a16:creationId xmlns:a16="http://schemas.microsoft.com/office/drawing/2014/main" id="{0E2835C4-EF81-2E6C-DB44-14C44E6510CB}"/>
               </a:ext>
             </a:extLst>
           </p:cNvPr>
@@ -2003,7 +2003,7 @@
           <a:bodyPr/>
           <a:lstStyle/>
           <a:p>
-            <a:fld id="{F0B12990-90F8-4915-B5EC-7ACE19A8FF3E}" type="slidenum">
+            <a:fld id="{38259BAE-92F0-47D0-9780-505BFE5668AA}" type="slidenum">
               <a:rPr lang="en-US" smtClean="0"/>
               <a:t>‹#›</a:t>
             </a:fld>
@@ -2014,7 +2014,7 @@
     </p:spTree>
     <p:extLst>
       <p:ext uri="{BB962C8B-B14F-4D97-AF65-F5344CB8AC3E}">
-        <p14:creationId xmlns:p14="http://schemas.microsoft.com/office/powerpoint/2010/main" val="3709736814"/>
+        <p14:creationId xmlns:p14="http://schemas.microsoft.com/office/powerpoint/2010/main" val="189484379"/>
       </p:ext>
     </p:extLst>
   </p:cSld>
@@ -2046,7 +2046,7 @@
           <p:cNvPr id="2" name="Date Placeholder 1">
             <a:extLst>
               <a:ext uri="{FF2B5EF4-FFF2-40B4-BE49-F238E27FC236}">
-                <a16:creationId xmlns:a16="http://schemas.microsoft.com/office/drawing/2014/main" id="{85606DD4-029B-E65D-1322-564B29CEB1CD}"/>
+                <a16:creationId xmlns:a16="http://schemas.microsoft.com/office/drawing/2014/main" id="{F38CB98B-C9D7-D844-4EAA-6C4A7FC0CF33}"/>
               </a:ext>
             </a:extLst>
           </p:cNvPr>
@@ -2062,9 +2062,9 @@
           <a:bodyPr/>
           <a:lstStyle/>
           <a:p>
-            <a:fld id="{0A1E9506-E54C-47BD-A6BA-2B5B28E28429}" type="datetimeFigureOut">
+            <a:fld id="{80941BF2-BD6C-4D80-B0F9-FDDDC9F135DD}" type="datetimeFigureOut">
               <a:rPr lang="en-US" smtClean="0"/>
-              <a:t>6/25/2026</a:t>
+              <a:t>6/26/2026</a:t>
             </a:fld>
             <a:endParaRPr lang="en-US"/>
           </a:p>
@@ -2075,7 +2075,7 @@
           <p:cNvPr id="3" name="Footer Placeholder 2">
             <a:extLst>
               <a:ext uri="{FF2B5EF4-FFF2-40B4-BE49-F238E27FC236}">
-                <a16:creationId xmlns:a16="http://schemas.microsoft.com/office/drawing/2014/main" id="{C09DBA27-4373-9D2C-8EB9-8A06BE941BDE}"/>
+                <a16:creationId xmlns:a16="http://schemas.microsoft.com/office/drawing/2014/main" id="{0748B51C-9CB1-D12A-0E7A-1C4742343A84}"/>
               </a:ext>
             </a:extLst>
           </p:cNvPr>
@@ -2100,7 +2100,7 @@
           <p:cNvPr id="4" name="Slide Number Placeholder 3">
             <a:extLst>
               <a:ext uri="{FF2B5EF4-FFF2-40B4-BE49-F238E27FC236}">
-                <a16:creationId xmlns:a16="http://schemas.microsoft.com/office/drawing/2014/main" id="{A5C62551-52FC-10D0-2F5D-B0E7FC104890}"/>
+                <a16:creationId xmlns:a16="http://schemas.microsoft.com/office/drawing/2014/main" id="{F15D7233-C0A8-B85E-EBAA-DAF2D650EA27}"/>
               </a:ext>
             </a:extLst>
           </p:cNvPr>
@@ -2116,7 +2116,7 @@
           <a:bodyPr/>
           <a:lstStyle/>
           <a:p>
-            <a:fld id="{F0B12990-90F8-4915-B5EC-7ACE19A8FF3E}" type="slidenum">
+            <a:fld id="{38259BAE-92F0-47D0-9780-505BFE5668AA}" type="slidenum">
               <a:rPr lang="en-US" smtClean="0"/>
               <a:t>‹#›</a:t>
             </a:fld>
@@ -2127,7 +2127,7 @@
     </p:spTree>
     <p:extLst>
       <p:ext uri="{BB962C8B-B14F-4D97-AF65-F5344CB8AC3E}">
-        <p14:creationId xmlns:p14="http://schemas.microsoft.com/office/powerpoint/2010/main" val="380852404"/>
+        <p14:creationId xmlns:p14="http://schemas.microsoft.com/office/powerpoint/2010/main" val="3108600247"/>
       </p:ext>
     </p:extLst>
   </p:cSld>
@@ -2159,7 +2159,7 @@
           <p:cNvPr id="2" name="Title 1">
             <a:extLst>
               <a:ext uri="{FF2B5EF4-FFF2-40B4-BE49-F238E27FC236}">
-                <a16:creationId xmlns:a16="http://schemas.microsoft.com/office/drawing/2014/main" id="{0C41AF56-C4DB-ED34-889E-AAA07E18925D}"/>
+                <a16:creationId xmlns:a16="http://schemas.microsoft.com/office/drawing/2014/main" id="{39557007-FD20-0F6B-0E1D-91CE5B0E6CD8}"/>
               </a:ext>
             </a:extLst>
           </p:cNvPr>
@@ -2196,7 +2196,7 @@
           <p:cNvPr id="3" name="Content Placeholder 2">
             <a:extLst>
               <a:ext uri="{FF2B5EF4-FFF2-40B4-BE49-F238E27FC236}">
-                <a16:creationId xmlns:a16="http://schemas.microsoft.com/office/drawing/2014/main" id="{D81FF099-753C-9365-0922-5682F3783D3F}"/>
+                <a16:creationId xmlns:a16="http://schemas.microsoft.com/office/drawing/2014/main" id="{05280F87-258C-A313-3DCC-7E3624420A14}"/>
               </a:ext>
             </a:extLst>
           </p:cNvPr>
@@ -2286,7 +2286,7 @@
           <p:cNvPr id="4" name="Text Placeholder 3">
             <a:extLst>
               <a:ext uri="{FF2B5EF4-FFF2-40B4-BE49-F238E27FC236}">
-                <a16:creationId xmlns:a16="http://schemas.microsoft.com/office/drawing/2014/main" id="{D490700E-C38D-17E6-C777-071FB9A71859}"/>
+                <a16:creationId xmlns:a16="http://schemas.microsoft.com/office/drawing/2014/main" id="{96BBA9ED-6518-398B-5F59-5170E207FB3C}"/>
               </a:ext>
             </a:extLst>
           </p:cNvPr>
@@ -2357,7 +2357,7 @@
           <p:cNvPr id="5" name="Date Placeholder 4">
             <a:extLst>
               <a:ext uri="{FF2B5EF4-FFF2-40B4-BE49-F238E27FC236}">
-                <a16:creationId xmlns:a16="http://schemas.microsoft.com/office/drawing/2014/main" id="{56B1F8C6-BFFF-E5DA-6F84-EBFD095ACC1F}"/>
+                <a16:creationId xmlns:a16="http://schemas.microsoft.com/office/drawing/2014/main" id="{E4F5FF89-EE2B-56E7-7C5E-689BB6E7461A}"/>
               </a:ext>
             </a:extLst>
           </p:cNvPr>
@@ -2373,9 +2373,9 @@
           <a:bodyPr/>
           <a:lstStyle/>
           <a:p>
-            <a:fld id="{0A1E9506-E54C-47BD-A6BA-2B5B28E28429}" type="datetimeFigureOut">
+            <a:fld id="{80941BF2-BD6C-4D80-B0F9-FDDDC9F135DD}" type="datetimeFigureOut">
               <a:rPr lang="en-US" smtClean="0"/>
-              <a:t>6/25/2026</a:t>
+              <a:t>6/26/2026</a:t>
             </a:fld>
             <a:endParaRPr lang="en-US"/>
           </a:p>
@@ -2386,7 +2386,7 @@
           <p:cNvPr id="6" name="Footer Placeholder 5">
             <a:extLst>
               <a:ext uri="{FF2B5EF4-FFF2-40B4-BE49-F238E27FC236}">
-                <a16:creationId xmlns:a16="http://schemas.microsoft.com/office/drawing/2014/main" id="{E4C4FCB7-053B-10B5-E8DC-C28F5FDE82A6}"/>
+                <a16:creationId xmlns:a16="http://schemas.microsoft.com/office/drawing/2014/main" id="{4D66F17F-64B7-23FF-BE9E-B2ED2B14335F}"/>
               </a:ext>
             </a:extLst>
           </p:cNvPr>
@@ -2411,7 +2411,7 @@
           <p:cNvPr id="7" name="Slide Number Placeholder 6">
             <a:extLst>
               <a:ext uri="{FF2B5EF4-FFF2-40B4-BE49-F238E27FC236}">
-                <a16:creationId xmlns:a16="http://schemas.microsoft.com/office/drawing/2014/main" id="{759FDC38-8CAF-63AD-2AE4-11918A8CEAD7}"/>
+                <a16:creationId xmlns:a16="http://schemas.microsoft.com/office/drawing/2014/main" id="{FCB38231-B2F0-6227-C334-7A716F0B0015}"/>
               </a:ext>
             </a:extLst>
           </p:cNvPr>
@@ -2427,7 +2427,7 @@
           <a:bodyPr/>
           <a:lstStyle/>
           <a:p>
-            <a:fld id="{F0B12990-90F8-4915-B5EC-7ACE19A8FF3E}" type="slidenum">
+            <a:fld id="{38259BAE-92F0-47D0-9780-505BFE5668AA}" type="slidenum">
               <a:rPr lang="en-US" smtClean="0"/>
               <a:t>‹#›</a:t>
             </a:fld>
@@ -2438,7 +2438,7 @@
     </p:spTree>
     <p:extLst>
       <p:ext uri="{BB962C8B-B14F-4D97-AF65-F5344CB8AC3E}">
-        <p14:creationId xmlns:p14="http://schemas.microsoft.com/office/powerpoint/2010/main" val="2637911314"/>
+        <p14:creationId xmlns:p14="http://schemas.microsoft.com/office/powerpoint/2010/main" val="3557406059"/>
       </p:ext>
     </p:extLst>
   </p:cSld>
@@ -2470,7 +2470,7 @@
           <p:cNvPr id="2" name="Title 1">
             <a:extLst>
               <a:ext uri="{FF2B5EF4-FFF2-40B4-BE49-F238E27FC236}">
-                <a16:creationId xmlns:a16="http://schemas.microsoft.com/office/drawing/2014/main" id="{07812DCC-A933-3F10-516F-5504EC44B4D1}"/>
+                <a16:creationId xmlns:a16="http://schemas.microsoft.com/office/drawing/2014/main" id="{A8DD2A78-FCC6-B7A1-2058-23045F7D51A7}"/>
               </a:ext>
             </a:extLst>
           </p:cNvPr>
@@ -2507,7 +2507,7 @@
           <p:cNvPr id="3" name="Picture Placeholder 2">
             <a:extLst>
               <a:ext uri="{FF2B5EF4-FFF2-40B4-BE49-F238E27FC236}">
-                <a16:creationId xmlns:a16="http://schemas.microsoft.com/office/drawing/2014/main" id="{D8842602-9580-213E-3A3B-67227A0B4487}"/>
+                <a16:creationId xmlns:a16="http://schemas.microsoft.com/office/drawing/2014/main" id="{7C634FF8-4952-4FF2-B816-F4247822163F}"/>
               </a:ext>
             </a:extLst>
           </p:cNvPr>
@@ -2574,7 +2574,7 @@
           <p:cNvPr id="4" name="Text Placeholder 3">
             <a:extLst>
               <a:ext uri="{FF2B5EF4-FFF2-40B4-BE49-F238E27FC236}">
-                <a16:creationId xmlns:a16="http://schemas.microsoft.com/office/drawing/2014/main" id="{B7D66275-B3E1-FF19-A55D-2F01E939D42A}"/>
+                <a16:creationId xmlns:a16="http://schemas.microsoft.com/office/drawing/2014/main" id="{09CE879D-7A8C-E42D-F5F4-E8F537873662}"/>
               </a:ext>
             </a:extLst>
           </p:cNvPr>
@@ -2645,7 +2645,7 @@
           <p:cNvPr id="5" name="Date Placeholder 4">
             <a:extLst>
               <a:ext uri="{FF2B5EF4-FFF2-40B4-BE49-F238E27FC236}">
-                <a16:creationId xmlns:a16="http://schemas.microsoft.com/office/drawing/2014/main" id="{A060DAFF-A57A-140E-CAD0-C5336DC938CE}"/>
+                <a16:creationId xmlns:a16="http://schemas.microsoft.com/office/drawing/2014/main" id="{F499FCF2-4293-3307-2EB9-8605E43EB193}"/>
               </a:ext>
             </a:extLst>
           </p:cNvPr>
@@ -2661,9 +2661,9 @@
           <a:bodyPr/>
           <a:lstStyle/>
           <a:p>
-            <a:fld id="{0A1E9506-E54C-47BD-A6BA-2B5B28E28429}" type="datetimeFigureOut">
+            <a:fld id="{80941BF2-BD6C-4D80-B0F9-FDDDC9F135DD}" type="datetimeFigureOut">
               <a:rPr lang="en-US" smtClean="0"/>
-              <a:t>6/25/2026</a:t>
+              <a:t>6/26/2026</a:t>
             </a:fld>
             <a:endParaRPr lang="en-US"/>
           </a:p>
@@ -2674,7 +2674,7 @@
           <p:cNvPr id="6" name="Footer Placeholder 5">
             <a:extLst>
               <a:ext uri="{FF2B5EF4-FFF2-40B4-BE49-F238E27FC236}">
-                <a16:creationId xmlns:a16="http://schemas.microsoft.com/office/drawing/2014/main" id="{2E1CF04B-9CA5-4502-688F-06D36C27BE0D}"/>
+                <a16:creationId xmlns:a16="http://schemas.microsoft.com/office/drawing/2014/main" id="{51F6836F-0A1D-3FA3-6FD0-7DEF33335085}"/>
               </a:ext>
             </a:extLst>
           </p:cNvPr>
@@ -2699,7 +2699,7 @@
           <p:cNvPr id="7" name="Slide Number Placeholder 6">
             <a:extLst>
               <a:ext uri="{FF2B5EF4-FFF2-40B4-BE49-F238E27FC236}">
-                <a16:creationId xmlns:a16="http://schemas.microsoft.com/office/drawing/2014/main" id="{8A652BDF-3C01-CAB0-0805-C6E38109CD00}"/>
+                <a16:creationId xmlns:a16="http://schemas.microsoft.com/office/drawing/2014/main" id="{626FD8BE-1F1A-4D07-CA96-7A4A69585CB9}"/>
               </a:ext>
             </a:extLst>
           </p:cNvPr>
@@ -2715,7 +2715,7 @@
           <a:bodyPr/>
           <a:lstStyle/>
           <a:p>
-            <a:fld id="{F0B12990-90F8-4915-B5EC-7ACE19A8FF3E}" type="slidenum">
+            <a:fld id="{38259BAE-92F0-47D0-9780-505BFE5668AA}" type="slidenum">
               <a:rPr lang="en-US" smtClean="0"/>
               <a:t>‹#›</a:t>
             </a:fld>
@@ -2726,7 +2726,7 @@
     </p:spTree>
     <p:extLst>
       <p:ext uri="{BB962C8B-B14F-4D97-AF65-F5344CB8AC3E}">
-        <p14:creationId xmlns:p14="http://schemas.microsoft.com/office/powerpoint/2010/main" val="2745578091"/>
+        <p14:creationId xmlns:p14="http://schemas.microsoft.com/office/powerpoint/2010/main" val="2184686037"/>
       </p:ext>
     </p:extLst>
   </p:cSld>
@@ -2763,7 +2763,7 @@
           <p:cNvPr id="2" name="Title Placeholder 1">
             <a:extLst>
               <a:ext uri="{FF2B5EF4-FFF2-40B4-BE49-F238E27FC236}">
-                <a16:creationId xmlns:a16="http://schemas.microsoft.com/office/drawing/2014/main" id="{204B9413-40F9-07C1-8E4D-0C076D7BBE62}"/>
+                <a16:creationId xmlns:a16="http://schemas.microsoft.com/office/drawing/2014/main" id="{EF19E9FB-5957-FCEA-6FAE-0B27E1916C98}"/>
               </a:ext>
             </a:extLst>
           </p:cNvPr>
@@ -2801,7 +2801,7 @@
           <p:cNvPr id="3" name="Text Placeholder 2">
             <a:extLst>
               <a:ext uri="{FF2B5EF4-FFF2-40B4-BE49-F238E27FC236}">
-                <a16:creationId xmlns:a16="http://schemas.microsoft.com/office/drawing/2014/main" id="{FD57E661-0567-9027-8132-544181A8BE8F}"/>
+                <a16:creationId xmlns:a16="http://schemas.microsoft.com/office/drawing/2014/main" id="{3D2CAB44-DA58-5F24-B513-0265A05B307E}"/>
               </a:ext>
             </a:extLst>
           </p:cNvPr>
@@ -2868,7 +2868,7 @@
           <p:cNvPr id="4" name="Date Placeholder 3">
             <a:extLst>
               <a:ext uri="{FF2B5EF4-FFF2-40B4-BE49-F238E27FC236}">
-                <a16:creationId xmlns:a16="http://schemas.microsoft.com/office/drawing/2014/main" id="{C1136760-54A9-004C-E4E8-158CE5F6F58C}"/>
+                <a16:creationId xmlns:a16="http://schemas.microsoft.com/office/drawing/2014/main" id="{799C7851-3CB7-FF39-8860-3C2BC1ABC8DB}"/>
               </a:ext>
             </a:extLst>
           </p:cNvPr>
@@ -2902,9 +2902,9 @@
             </a:lvl1pPr>
           </a:lstStyle>
           <a:p>
-            <a:fld id="{0A1E9506-E54C-47BD-A6BA-2B5B28E28429}" type="datetimeFigureOut">
+            <a:fld id="{80941BF2-BD6C-4D80-B0F9-FDDDC9F135DD}" type="datetimeFigureOut">
               <a:rPr lang="en-US" smtClean="0"/>
-              <a:t>6/25/2026</a:t>
+              <a:t>6/26/2026</a:t>
             </a:fld>
             <a:endParaRPr lang="en-US"/>
           </a:p>
@@ -2915,7 +2915,7 @@
           <p:cNvPr id="5" name="Footer Placeholder 4">
             <a:extLst>
               <a:ext uri="{FF2B5EF4-FFF2-40B4-BE49-F238E27FC236}">
-                <a16:creationId xmlns:a16="http://schemas.microsoft.com/office/drawing/2014/main" id="{074C96DE-1B6F-2D13-C614-D86E6FF7DE15}"/>
+                <a16:creationId xmlns:a16="http://schemas.microsoft.com/office/drawing/2014/main" id="{B3F909C1-6BE0-A96A-1AF6-0CCBB561658B}"/>
               </a:ext>
             </a:extLst>
           </p:cNvPr>
@@ -2958,7 +2958,7 @@
           <p:cNvPr id="6" name="Slide Number Placeholder 5">
             <a:extLst>
               <a:ext uri="{FF2B5EF4-FFF2-40B4-BE49-F238E27FC236}">
-                <a16:creationId xmlns:a16="http://schemas.microsoft.com/office/drawing/2014/main" id="{6679F702-72C4-36E0-A0B4-61A5D84815A0}"/>
+                <a16:creationId xmlns:a16="http://schemas.microsoft.com/office/drawing/2014/main" id="{F1709D32-9B46-B032-FE82-733A7530BF98}"/>
               </a:ext>
             </a:extLst>
           </p:cNvPr>
@@ -2992,7 +2992,7 @@
             </a:lvl1pPr>
           </a:lstStyle>
           <a:p>
-            <a:fld id="{F0B12990-90F8-4915-B5EC-7ACE19A8FF3E}" type="slidenum">
+            <a:fld id="{38259BAE-92F0-47D0-9780-505BFE5668AA}" type="slidenum">
               <a:rPr lang="en-US" smtClean="0"/>
               <a:t>‹#›</a:t>
             </a:fld>
@@ -3003,7 +3003,7 @@
     </p:spTree>
     <p:extLst>
       <p:ext uri="{BB962C8B-B14F-4D97-AF65-F5344CB8AC3E}">
-        <p14:creationId xmlns:p14="http://schemas.microsoft.com/office/powerpoint/2010/main" val="987700117"/>
+        <p14:creationId xmlns:p14="http://schemas.microsoft.com/office/powerpoint/2010/main" val="3789160684"/>
       </p:ext>
     </p:extLst>
   </p:cSld>
@@ -3326,7 +3326,7 @@
           <p:cNvPr id="2" name="Table 1">
             <a:extLst>
               <a:ext uri="{FF2B5EF4-FFF2-40B4-BE49-F238E27FC236}">
-                <a16:creationId xmlns:a16="http://schemas.microsoft.com/office/drawing/2014/main" id="{330197FB-D7F1-9CCE-9F42-159040BD07A9}"/>
+                <a16:creationId xmlns:a16="http://schemas.microsoft.com/office/drawing/2014/main" id="{A2B221F9-5F7C-9999-78EC-05107B5EE0D3}"/>
               </a:ext>
             </a:extLst>
           </p:cNvPr>
@@ -3336,7 +3336,7 @@
           <p:nvPr>
             <p:extLst>
               <p:ext uri="{D42A27DB-BD31-4B8C-83A1-F6EECF244321}">
-                <p14:modId xmlns:p14="http://schemas.microsoft.com/office/powerpoint/2010/main" val="1933623058"/>
+                <p14:modId xmlns:p14="http://schemas.microsoft.com/office/powerpoint/2010/main" val="3435453564"/>
               </p:ext>
             </p:extLst>
           </p:nvPr>
@@ -3355,21 +3355,21 @@
                 <a:gridCol w="2794000">
                   <a:extLst>
                     <a:ext uri="{9D8B030D-6E8A-4147-A177-3AD203B41FA5}">
-                      <a16:colId xmlns:a16="http://schemas.microsoft.com/office/drawing/2014/main" val="596671731"/>
+                      <a16:colId xmlns:a16="http://schemas.microsoft.com/office/drawing/2014/main" val="170597252"/>
                     </a:ext>
                   </a:extLst>
                 </a:gridCol>
                 <a:gridCol w="3048000">
                   <a:extLst>
                     <a:ext uri="{9D8B030D-6E8A-4147-A177-3AD203B41FA5}">
-                      <a16:colId xmlns:a16="http://schemas.microsoft.com/office/drawing/2014/main" val="3792083064"/>
+                      <a16:colId xmlns:a16="http://schemas.microsoft.com/office/drawing/2014/main" val="1413477260"/>
                     </a:ext>
                   </a:extLst>
                 </a:gridCol>
                 <a:gridCol w="3048000">
                   <a:extLst>
                     <a:ext uri="{9D8B030D-6E8A-4147-A177-3AD203B41FA5}">
-                      <a16:colId xmlns:a16="http://schemas.microsoft.com/office/drawing/2014/main" val="1015922415"/>
+                      <a16:colId xmlns:a16="http://schemas.microsoft.com/office/drawing/2014/main" val="3845995890"/>
                     </a:ext>
                   </a:extLst>
                 </a:gridCol>
@@ -3419,7 +3419,7 @@
                 </a:tc>
                 <a:extLst>
                   <a:ext uri="{0D108BD9-81ED-4DB2-BD59-A6C34878D82A}">
-                    <a16:rowId xmlns:a16="http://schemas.microsoft.com/office/drawing/2014/main" val="334432449"/>
+                    <a16:rowId xmlns:a16="http://schemas.microsoft.com/office/drawing/2014/main" val="1693344920"/>
                   </a:ext>
                 </a:extLst>
               </a:tr>
@@ -3468,7 +3468,7 @@
                 </a:tc>
                 <a:extLst>
                   <a:ext uri="{0D108BD9-81ED-4DB2-BD59-A6C34878D82A}">
-                    <a16:rowId xmlns:a16="http://schemas.microsoft.com/office/drawing/2014/main" val="2769246230"/>
+                    <a16:rowId xmlns:a16="http://schemas.microsoft.com/office/drawing/2014/main" val="2080701781"/>
                   </a:ext>
                 </a:extLst>
               </a:tr>
@@ -3517,7 +3517,7 @@
                 </a:tc>
                 <a:extLst>
                   <a:ext uri="{0D108BD9-81ED-4DB2-BD59-A6C34878D82A}">
-                    <a16:rowId xmlns:a16="http://schemas.microsoft.com/office/drawing/2014/main" val="3574221772"/>
+                    <a16:rowId xmlns:a16="http://schemas.microsoft.com/office/drawing/2014/main" val="2473485681"/>
                   </a:ext>
                 </a:extLst>
               </a:tr>
@@ -3562,7 +3562,7 @@
                 </a:tc>
                 <a:extLst>
                   <a:ext uri="{0D108BD9-81ED-4DB2-BD59-A6C34878D82A}">
-                    <a16:rowId xmlns:a16="http://schemas.microsoft.com/office/drawing/2014/main" val="2264073915"/>
+                    <a16:rowId xmlns:a16="http://schemas.microsoft.com/office/drawing/2014/main" val="3298342303"/>
                   </a:ext>
                 </a:extLst>
               </a:tr>
@@ -3573,7 +3573,7 @@
     </p:spTree>
     <p:extLst>
       <p:ext uri="{BB962C8B-B14F-4D97-AF65-F5344CB8AC3E}">
-        <p14:creationId xmlns:p14="http://schemas.microsoft.com/office/powerpoint/2010/main" val="3891152995"/>
+        <p14:creationId xmlns:p14="http://schemas.microsoft.com/office/powerpoint/2010/main" val="4138474357"/>
       </p:ext>
     </p:extLst>
   </p:cSld>
